--- a/Org-Development-And-Mentoring.pptx
+++ b/Org-Development-And-Mentoring.pptx
@@ -2862,7 +2862,7 @@
               <a:rPr sz="1300">
                 <a:latin typeface="IRANSans"/>
               </a:rPr>
-              <a:t>تافلر در کتاب «موج سوم» (۱۹۸۰) این چارچوب را معرفی کرد.</a:t>
+              <a:t>دقت در انتساب: آلوین تافلر در کتاب «موج سوم» (۱۹۸۰) سه موج اول را معرفی کرد.</a:t>
             </a:r>
           </a:p>
           <a:p>
@@ -2871,7 +2871,43 @@
               <a:rPr sz="1300">
                 <a:latin typeface="IRANSans"/>
               </a:rPr>
+              <a:t>موج چهارم و پنجم افزوده‌های بعدی‌اند و از ادبیات صنعتی می‌آیند:</a:t>
+            </a:r>
+          </a:p>
+          <a:p>
+            <a:pPr rtl="1" algn="r"/>
+            <a:r>
+              <a:rPr sz="1300">
+                <a:latin typeface="IRANSans"/>
+              </a:rPr>
+              <a:t>«صنعت ۴٫۰» (نمایشگاه هانوفر، ۲۰۱۱) و «صنعت ۵٫۰» (کمیسیون اروپا، ۲۰۲۱).</a:t>
+            </a:r>
+          </a:p>
+          <a:p>
+            <a:pPr rtl="1" algn="r"/>
+            <a:r>
+              <a:rPr sz="1300">
+                <a:latin typeface="IRANSans"/>
+              </a:rPr>
+              <a:t>اگر کسی پرسید، همین را صادقانه بگویید؛ چارچوب پنج‌موجی یک تعمیم مفید است، نه نقل‌قول تافلر.</a:t>
+            </a:r>
+          </a:p>
+          <a:p>
+            <a:pPr rtl="1" algn="r"/>
+            <a:r>
+              <a:rPr sz="1300">
+                <a:latin typeface="IRANSans"/>
+              </a:rPr>
               <a:t>تأکید: موج دوم بد نیست — برای زمان خودش درست بود. مسئله، ماندن در آن است.</a:t>
+            </a:r>
+          </a:p>
+          <a:p>
+            <a:pPr rtl="1" algn="r"/>
+            <a:r>
+              <a:rPr sz="1300">
+                <a:latin typeface="IRANSans"/>
+              </a:rPr>
+              <a:t>تاریخ‌ها تقریبی‌اند و مرز موج‌ها در منابع مختلف کمی جابه‌جا می‌شود.</a:t>
             </a:r>
           </a:p>
         </p:txBody>
@@ -2954,6 +2990,69 @@
               <a:rPr sz="1300">
                 <a:latin typeface="IRANSans"/>
               </a:rPr>
+              <a:t>تفکیک پنج ستون عمدی است: موج چهارم و پنجم دو منطق متفاوت‌اند،</a:t>
+            </a:r>
+          </a:p>
+          <a:p>
+            <a:pPr rtl="1" algn="r"/>
+            <a:r>
+              <a:rPr sz="1300">
+                <a:latin typeface="IRANSans"/>
+              </a:rPr>
+              <a:t>نه یک دوره واحد. موج چهارم درباره «داده و خودکارسازی» است،</a:t>
+            </a:r>
+          </a:p>
+          <a:p>
+            <a:pPr rtl="1" algn="r"/>
+            <a:r>
+              <a:rPr sz="1300">
+                <a:latin typeface="IRANSans"/>
+              </a:rPr>
+              <a:t>موج پنجم درباره «انسان، تاب‌آوری و پایداری».</a:t>
+            </a:r>
+          </a:p>
+          <a:p>
+            <a:pPr rtl="1" algn="r"/>
+            <a:r>
+              <a:rPr sz="1300">
+                <a:latin typeface="IRANSans"/>
+              </a:rPr>
+              <a:t>تاریخِ زیر عنوان هر ستون، بازه خودِ موج است و تاریخ کنار هر مکتب،</a:t>
+            </a:r>
+          </a:p>
+          <a:p>
+            <a:pPr rtl="1" algn="r"/>
+            <a:r>
+              <a:rPr sz="1300">
+                <a:latin typeface="IRANSans"/>
+              </a:rPr>
+              <a:t>سال انتشار اثر شاخص آن. مکاتب معمولاً با تأخیر نسبت به موج شکل می‌گیرند</a:t>
+            </a:r>
+          </a:p>
+          <a:p>
+            <a:pPr rtl="1" algn="r"/>
+            <a:r>
+              <a:rPr sz="1300">
+                <a:latin typeface="IRANSans"/>
+              </a:rPr>
+              <a:t>(مثلاً تیلور ۱۹۱۱، یعنی حدود ۱۵۰ سال پس از آغاز موج دوم).</a:t>
+            </a:r>
+          </a:p>
+          <a:p>
+            <a:pPr rtl="1" algn="r"/>
+            <a:r>
+              <a:rPr sz="1300">
+                <a:latin typeface="IRANSans"/>
+              </a:rPr>
+              <a:t>مکاتب هم حذف نمی‌شوند؛ روی هم انباشته می‌شوند.</a:t>
+            </a:r>
+          </a:p>
+          <a:p>
+            <a:pPr rtl="1" algn="r"/>
+            <a:r>
+              <a:rPr sz="1300">
+                <a:latin typeface="IRANSans"/>
+              </a:rPr>
               <a:t>پیام: ستون آبی (موج دوم) هنوز شیوه غالب مدیریت در سازمان‌های ماست،</a:t>
             </a:r>
           </a:p>
@@ -2963,7 +3062,7 @@
               <a:rPr sz="1300">
                 <a:latin typeface="IRANSans"/>
               </a:rPr>
-              <a:t>در حالی که محیط کسب‌وکار وارد ستون نارنجی شده است.</a:t>
+              <a:t>در حالی که محیط کسب‌وکار وارد ستون‌های چهارم و پنجم شده است.</a:t>
             </a:r>
           </a:p>
           <a:p>
@@ -22067,7 +22166,7 @@
                 <a:cs typeface="IRANSans"/>
                 <a:ea typeface="IRANSans"/>
               </a:rPr>
-              <a:t>۹۰٪ روی کلاس و دوره</a:t>
+              <a:t>عمدتاً روی کلاس و دوره</a:t>
             </a:r>
           </a:p>
         </p:txBody>
@@ -22125,7 +22224,7 @@
                 <a:cs typeface="IRANSans"/>
                 <a:ea typeface="IRANSans"/>
               </a:rPr>
-              <a:t>۹۰٪</a:t>
+              <a:t>بخش عمده بودجه</a:t>
             </a:r>
             <a:r>
               <a:rPr sz="1550" b="0">
@@ -22136,7 +22235,7 @@
                 <a:cs typeface="IRANSans"/>
                 <a:ea typeface="IRANSans"/>
               </a:rPr>
-              <a:t> بودجه، روی </a:t>
+              <a:t>، روی </a:t>
             </a:r>
             <a:r>
               <a:rPr sz="1550" b="1">
@@ -48754,7 +48853,7 @@
                 <a:cs typeface="IRANSans"/>
                 <a:ea typeface="IRANSans"/>
               </a:rPr>
-              <a:t>از تافلر تا امروز</a:t>
+              <a:t>سه موج تافلر (۱۹۸۰) + دو موج صنعتی که بعد از او افزوده شد</a:t>
             </a:r>
           </a:p>
         </p:txBody>
@@ -50401,7 +50500,7 @@
                 <a:cs typeface="IRANSans"/>
                 <a:ea typeface="IRANSans"/>
               </a:rPr>
-              <a:t>۲۰۱۱ ـ ۲۰۲۰</a:t>
+              <a:t>۲۰۱۱ ـ امروز</a:t>
             </a:r>
           </a:p>
         </p:txBody>
@@ -50842,7 +50941,7 @@
                 <a:cs typeface="IRANSans"/>
                 <a:ea typeface="IRANSans"/>
               </a:rPr>
-              <a:t>۲۰۲۱ ـ آینده</a:t>
+              <a:t>۲۰۲۱ به بعد</a:t>
             </a:r>
           </a:p>
         </p:txBody>
@@ -51470,7 +51569,7 @@
                 <a:cs typeface="IRANSans"/>
                 <a:ea typeface="IRANSans"/>
               </a:rPr>
-              <a:t>نقشه تاریخی مکاتب مدیریت</a:t>
+              <a:t>نقشه تاریخی مکاتب مدیریت — پنج موج، پنج پاسخ متفاوت</a:t>
             </a:r>
           </a:p>
         </p:txBody>
@@ -51568,469 +51667,14 @@
       </p:sp>
       <p:sp>
         <p:nvSpPr>
-          <p:cNvPr id="6" name="Rectangle 5"/>
+          <p:cNvPr id="6" name="Rounded Rectangle 5"/>
           <p:cNvSpPr/>
           <p:nvPr/>
         </p:nvSpPr>
         <p:spPr>
           <a:xfrm>
-            <a:off x="9966091" y="1481328"/>
-            <a:ext cx="1631243" cy="310896"/>
-          </a:xfrm>
-          <a:prstGeom prst="rect">
-            <a:avLst/>
-          </a:prstGeom>
-          <a:solidFill>
-            <a:srgbClr val="1E8E5A"/>
-          </a:solidFill>
-          <a:ln>
-            <a:noFill/>
-          </a:ln>
-          <a:effectLst/>
-        </p:spPr>
-        <p:style>
-          <a:lnRef idx="1">
-            <a:schemeClr val="accent1"/>
-          </a:lnRef>
-          <a:fillRef idx="3">
-            <a:schemeClr val="accent1"/>
-          </a:fillRef>
-          <a:effectRef idx="2">
-            <a:schemeClr val="accent1"/>
-          </a:effectRef>
-          <a:fontRef idx="minor">
-            <a:schemeClr val="lt1"/>
-          </a:fontRef>
-        </p:style>
-        <p:txBody>
-          <a:bodyPr rtlCol="0" anchor="ctr" wrap="square"/>
-          <a:lstStyle/>
-          <a:p>
-            <a:pPr algn="ctr"/>
-          </a:p>
-        </p:txBody>
-      </p:sp>
-      <p:sp>
-        <p:nvSpPr>
-          <p:cNvPr id="7" name="TextBox 6"/>
-          <p:cNvSpPr txBox="1"/>
-          <p:nvPr/>
-        </p:nvSpPr>
-        <p:spPr>
-          <a:xfrm>
-            <a:off x="9966091" y="1481328"/>
-            <a:ext cx="1658675" cy="310896"/>
-          </a:xfrm>
-          <a:prstGeom prst="rect">
-            <a:avLst/>
-          </a:prstGeom>
-          <a:noFill/>
-        </p:spPr>
-        <p:txBody>
-          <a:bodyPr wrap="square" lIns="36576" rIns="36576" tIns="0" bIns="0" anchor="ctr">
-            <a:spAutoFit/>
-          </a:bodyPr>
-          <a:lstStyle/>
-          <a:p>
-            <a:pPr rtl="1" algn="ctr">
-              <a:lnSpc>
-                <a:spcPct val="100000"/>
-              </a:lnSpc>
-              <a:spcBef>
-                <a:spcPts val="0"/>
-              </a:spcBef>
-              <a:spcAft>
-                <a:spcPts val="0"/>
-              </a:spcAft>
-            </a:pPr>
-            <a:r>
-              <a:rPr sz="1300" b="1">
-                <a:solidFill>
-                  <a:srgbClr val="FFFFFF"/>
-                </a:solidFill>
-                <a:latin typeface="IRANSans"/>
-                <a:cs typeface="IRANSans"/>
-                <a:ea typeface="IRANSans"/>
-              </a:rPr>
-              <a:t>موج اول</a:t>
-            </a:r>
-          </a:p>
-        </p:txBody>
-      </p:sp>
-      <p:sp>
-        <p:nvSpPr>
-          <p:cNvPr id="8" name="Rectangle 7"/>
-          <p:cNvSpPr/>
-          <p:nvPr/>
-        </p:nvSpPr>
-        <p:spPr>
-          <a:xfrm>
-            <a:off x="6206425" y="1481328"/>
-            <a:ext cx="3732233" cy="310896"/>
-          </a:xfrm>
-          <a:prstGeom prst="rect">
-            <a:avLst/>
-          </a:prstGeom>
-          <a:solidFill>
-            <a:srgbClr val="2A6F97"/>
-          </a:solidFill>
-          <a:ln>
-            <a:noFill/>
-          </a:ln>
-          <a:effectLst/>
-        </p:spPr>
-        <p:style>
-          <a:lnRef idx="1">
-            <a:schemeClr val="accent1"/>
-          </a:lnRef>
-          <a:fillRef idx="3">
-            <a:schemeClr val="accent1"/>
-          </a:fillRef>
-          <a:effectRef idx="2">
-            <a:schemeClr val="accent1"/>
-          </a:effectRef>
-          <a:fontRef idx="minor">
-            <a:schemeClr val="lt1"/>
-          </a:fontRef>
-        </p:style>
-        <p:txBody>
-          <a:bodyPr rtlCol="0" anchor="ctr" wrap="square"/>
-          <a:lstStyle/>
-          <a:p>
-            <a:pPr algn="ctr"/>
-          </a:p>
-        </p:txBody>
-      </p:sp>
-      <p:sp>
-        <p:nvSpPr>
-          <p:cNvPr id="9" name="TextBox 8"/>
-          <p:cNvSpPr txBox="1"/>
-          <p:nvPr/>
-        </p:nvSpPr>
-        <p:spPr>
-          <a:xfrm>
-            <a:off x="6206425" y="1481328"/>
-            <a:ext cx="3759665" cy="310896"/>
-          </a:xfrm>
-          <a:prstGeom prst="rect">
-            <a:avLst/>
-          </a:prstGeom>
-          <a:noFill/>
-        </p:spPr>
-        <p:txBody>
-          <a:bodyPr wrap="square" lIns="36576" rIns="36576" tIns="0" bIns="0" anchor="ctr">
-            <a:spAutoFit/>
-          </a:bodyPr>
-          <a:lstStyle/>
-          <a:p>
-            <a:pPr rtl="1" algn="ctr">
-              <a:lnSpc>
-                <a:spcPct val="100000"/>
-              </a:lnSpc>
-              <a:spcBef>
-                <a:spcPts val="0"/>
-              </a:spcBef>
-              <a:spcAft>
-                <a:spcPts val="0"/>
-              </a:spcAft>
-            </a:pPr>
-            <a:r>
-              <a:rPr sz="1300" b="1">
-                <a:solidFill>
-                  <a:srgbClr val="FFFFFF"/>
-                </a:solidFill>
-                <a:latin typeface="IRANSans"/>
-                <a:cs typeface="IRANSans"/>
-                <a:ea typeface="IRANSans"/>
-              </a:rPr>
-              <a:t>موج دوم</a:t>
-            </a:r>
-          </a:p>
-        </p:txBody>
-      </p:sp>
-      <p:sp>
-        <p:nvSpPr>
-          <p:cNvPr id="10" name="Rectangle 9"/>
-          <p:cNvSpPr/>
-          <p:nvPr/>
-        </p:nvSpPr>
-        <p:spPr>
-          <a:xfrm>
-            <a:off x="2999652" y="1481328"/>
-            <a:ext cx="3179341" cy="310896"/>
-          </a:xfrm>
-          <a:prstGeom prst="rect">
-            <a:avLst/>
-          </a:prstGeom>
-          <a:solidFill>
-            <a:srgbClr val="8E44AD"/>
-          </a:solidFill>
-          <a:ln>
-            <a:noFill/>
-          </a:ln>
-          <a:effectLst/>
-        </p:spPr>
-        <p:style>
-          <a:lnRef idx="1">
-            <a:schemeClr val="accent1"/>
-          </a:lnRef>
-          <a:fillRef idx="3">
-            <a:schemeClr val="accent1"/>
-          </a:fillRef>
-          <a:effectRef idx="2">
-            <a:schemeClr val="accent1"/>
-          </a:effectRef>
-          <a:fontRef idx="minor">
-            <a:schemeClr val="lt1"/>
-          </a:fontRef>
-        </p:style>
-        <p:txBody>
-          <a:bodyPr rtlCol="0" anchor="ctr" wrap="square"/>
-          <a:lstStyle/>
-          <a:p>
-            <a:pPr algn="ctr"/>
-          </a:p>
-        </p:txBody>
-      </p:sp>
-      <p:sp>
-        <p:nvSpPr>
-          <p:cNvPr id="11" name="TextBox 10"/>
-          <p:cNvSpPr txBox="1"/>
-          <p:nvPr/>
-        </p:nvSpPr>
-        <p:spPr>
-          <a:xfrm>
-            <a:off x="2999652" y="1481328"/>
-            <a:ext cx="3206773" cy="310896"/>
-          </a:xfrm>
-          <a:prstGeom prst="rect">
-            <a:avLst/>
-          </a:prstGeom>
-          <a:noFill/>
-        </p:spPr>
-        <p:txBody>
-          <a:bodyPr wrap="square" lIns="36576" rIns="36576" tIns="0" bIns="0" anchor="ctr">
-            <a:spAutoFit/>
-          </a:bodyPr>
-          <a:lstStyle/>
-          <a:p>
-            <a:pPr rtl="1" algn="ctr">
-              <a:lnSpc>
-                <a:spcPct val="100000"/>
-              </a:lnSpc>
-              <a:spcBef>
-                <a:spcPts val="0"/>
-              </a:spcBef>
-              <a:spcAft>
-                <a:spcPts val="0"/>
-              </a:spcAft>
-            </a:pPr>
-            <a:r>
-              <a:rPr sz="1300" b="1">
-                <a:solidFill>
-                  <a:srgbClr val="FFFFFF"/>
-                </a:solidFill>
-                <a:latin typeface="IRANSans"/>
-                <a:cs typeface="IRANSans"/>
-                <a:ea typeface="IRANSans"/>
-              </a:rPr>
-              <a:t>موج سوم</a:t>
-            </a:r>
-          </a:p>
-        </p:txBody>
-      </p:sp>
-      <p:sp>
-        <p:nvSpPr>
-          <p:cNvPr id="12" name="Rectangle 11"/>
-          <p:cNvSpPr/>
-          <p:nvPr/>
-        </p:nvSpPr>
-        <p:spPr>
-          <a:xfrm>
-            <a:off x="1562133" y="1481328"/>
-            <a:ext cx="1410087" cy="310896"/>
-          </a:xfrm>
-          <a:prstGeom prst="rect">
-            <a:avLst/>
-          </a:prstGeom>
-          <a:solidFill>
-            <a:srgbClr val="62B6CB"/>
-          </a:solidFill>
-          <a:ln>
-            <a:noFill/>
-          </a:ln>
-          <a:effectLst/>
-        </p:spPr>
-        <p:style>
-          <a:lnRef idx="1">
-            <a:schemeClr val="accent1"/>
-          </a:lnRef>
-          <a:fillRef idx="3">
-            <a:schemeClr val="accent1"/>
-          </a:fillRef>
-          <a:effectRef idx="2">
-            <a:schemeClr val="accent1"/>
-          </a:effectRef>
-          <a:fontRef idx="minor">
-            <a:schemeClr val="lt1"/>
-          </a:fontRef>
-        </p:style>
-        <p:txBody>
-          <a:bodyPr rtlCol="0" anchor="ctr" wrap="square"/>
-          <a:lstStyle/>
-          <a:p>
-            <a:pPr algn="ctr"/>
-          </a:p>
-        </p:txBody>
-      </p:sp>
-      <p:sp>
-        <p:nvSpPr>
-          <p:cNvPr id="13" name="TextBox 12"/>
-          <p:cNvSpPr txBox="1"/>
-          <p:nvPr/>
-        </p:nvSpPr>
-        <p:spPr>
-          <a:xfrm>
-            <a:off x="1562133" y="1481328"/>
-            <a:ext cx="1437519" cy="310896"/>
-          </a:xfrm>
-          <a:prstGeom prst="rect">
-            <a:avLst/>
-          </a:prstGeom>
-          <a:noFill/>
-        </p:spPr>
-        <p:txBody>
-          <a:bodyPr wrap="square" lIns="36576" rIns="36576" tIns="0" bIns="0" anchor="ctr">
-            <a:spAutoFit/>
-          </a:bodyPr>
-          <a:lstStyle/>
-          <a:p>
-            <a:pPr rtl="1" algn="ctr">
-              <a:lnSpc>
-                <a:spcPct val="100000"/>
-              </a:lnSpc>
-              <a:spcBef>
-                <a:spcPts val="0"/>
-              </a:spcBef>
-              <a:spcAft>
-                <a:spcPts val="0"/>
-              </a:spcAft>
-            </a:pPr>
-            <a:r>
-              <a:rPr sz="1300" b="1">
-                <a:solidFill>
-                  <a:srgbClr val="FFFFFF"/>
-                </a:solidFill>
-                <a:latin typeface="IRANSans"/>
-                <a:cs typeface="IRANSans"/>
-                <a:ea typeface="IRANSans"/>
-              </a:rPr>
-              <a:t>چهارم</a:t>
-            </a:r>
-          </a:p>
-        </p:txBody>
-      </p:sp>
-      <p:sp>
-        <p:nvSpPr>
-          <p:cNvPr id="14" name="Rectangle 13"/>
-          <p:cNvSpPr/>
-          <p:nvPr/>
-        </p:nvSpPr>
-        <p:spPr>
-          <a:xfrm>
-            <a:off x="566928" y="1481328"/>
-            <a:ext cx="967773" cy="310896"/>
-          </a:xfrm>
-          <a:prstGeom prst="rect">
-            <a:avLst/>
-          </a:prstGeom>
-          <a:solidFill>
-            <a:srgbClr val="FF6B35"/>
-          </a:solidFill>
-          <a:ln>
-            <a:noFill/>
-          </a:ln>
-          <a:effectLst/>
-        </p:spPr>
-        <p:style>
-          <a:lnRef idx="1">
-            <a:schemeClr val="accent1"/>
-          </a:lnRef>
-          <a:fillRef idx="3">
-            <a:schemeClr val="accent1"/>
-          </a:fillRef>
-          <a:effectRef idx="2">
-            <a:schemeClr val="accent1"/>
-          </a:effectRef>
-          <a:fontRef idx="minor">
-            <a:schemeClr val="lt1"/>
-          </a:fontRef>
-        </p:style>
-        <p:txBody>
-          <a:bodyPr rtlCol="0" anchor="ctr" wrap="square"/>
-          <a:lstStyle/>
-          <a:p>
-            <a:pPr algn="ctr"/>
-          </a:p>
-        </p:txBody>
-      </p:sp>
-      <p:sp>
-        <p:nvSpPr>
-          <p:cNvPr id="15" name="TextBox 14"/>
-          <p:cNvSpPr txBox="1"/>
-          <p:nvPr/>
-        </p:nvSpPr>
-        <p:spPr>
-          <a:xfrm>
-            <a:off x="566928" y="1481328"/>
-            <a:ext cx="995205" cy="310896"/>
-          </a:xfrm>
-          <a:prstGeom prst="rect">
-            <a:avLst/>
-          </a:prstGeom>
-          <a:noFill/>
-        </p:spPr>
-        <p:txBody>
-          <a:bodyPr wrap="square" lIns="36576" rIns="36576" tIns="0" bIns="0" anchor="ctr">
-            <a:spAutoFit/>
-          </a:bodyPr>
-          <a:lstStyle/>
-          <a:p>
-            <a:pPr rtl="1" algn="ctr">
-              <a:lnSpc>
-                <a:spcPct val="100000"/>
-              </a:lnSpc>
-              <a:spcBef>
-                <a:spcPts val="0"/>
-              </a:spcBef>
-              <a:spcAft>
-                <a:spcPts val="0"/>
-              </a:spcAft>
-            </a:pPr>
-            <a:r>
-              <a:rPr sz="1300" b="1">
-                <a:solidFill>
-                  <a:srgbClr val="FFFFFF"/>
-                </a:solidFill>
-                <a:latin typeface="IRANSans"/>
-                <a:cs typeface="IRANSans"/>
-                <a:ea typeface="IRANSans"/>
-              </a:rPr>
-              <a:t>پنجم</a:t>
-            </a:r>
-          </a:p>
-        </p:txBody>
-      </p:sp>
-      <p:sp>
-        <p:nvSpPr>
-          <p:cNvPr id="16" name="Rounded Rectangle 15"/>
-          <p:cNvSpPr/>
-          <p:nvPr/>
-        </p:nvSpPr>
-        <p:spPr>
-          <a:xfrm>
-            <a:off x="9841687" y="1975104"/>
-            <a:ext cx="1783080" cy="3712463"/>
+            <a:off x="10234879" y="1517904"/>
+            <a:ext cx="1389888" cy="4133087"/>
           </a:xfrm>
           <a:prstGeom prst="roundRect">
             <a:avLst>
@@ -52071,18 +51715,18 @@
       </p:sp>
       <p:sp>
         <p:nvSpPr>
-          <p:cNvPr id="17" name="Rounded Rectangle 16"/>
+          <p:cNvPr id="7" name="Rounded Rectangle 6"/>
           <p:cNvSpPr/>
           <p:nvPr/>
         </p:nvSpPr>
         <p:spPr>
           <a:xfrm>
-            <a:off x="9841687" y="1975104"/>
-            <a:ext cx="1783080" cy="457200"/>
+            <a:off x="10234879" y="1517904"/>
+            <a:ext cx="1389888" cy="713232"/>
           </a:xfrm>
           <a:prstGeom prst="roundRect">
             <a:avLst>
-              <a:gd name="adj" fmla="val 12000"/>
+              <a:gd name="adj" fmla="val 10000"/>
             </a:avLst>
           </a:prstGeom>
           <a:solidFill>
@@ -52117,14 +51761,14 @@
       </p:sp>
       <p:sp>
         <p:nvSpPr>
-          <p:cNvPr id="18" name="Rectangle 17"/>
+          <p:cNvPr id="8" name="Rectangle 7"/>
           <p:cNvSpPr/>
           <p:nvPr/>
         </p:nvSpPr>
         <p:spPr>
           <a:xfrm>
-            <a:off x="9841687" y="2286000"/>
-            <a:ext cx="1783080" cy="146304"/>
+            <a:off x="10234879" y="2084832"/>
+            <a:ext cx="1389888" cy="146304"/>
           </a:xfrm>
           <a:prstGeom prst="rect">
             <a:avLst/>
@@ -52161,14 +51805,14 @@
       </p:sp>
       <p:sp>
         <p:nvSpPr>
-          <p:cNvPr id="19" name="TextBox 18"/>
+          <p:cNvPr id="9" name="TextBox 8"/>
           <p:cNvSpPr txBox="1"/>
           <p:nvPr/>
         </p:nvSpPr>
         <p:spPr>
           <a:xfrm>
-            <a:off x="9841687" y="1975104"/>
-            <a:ext cx="1783080" cy="457200"/>
+            <a:off x="10289743" y="1517904"/>
+            <a:ext cx="1280160" cy="713232"/>
           </a:xfrm>
           <a:prstGeom prst="rect">
             <a:avLst/>
@@ -52183,17 +51827,17 @@
           <a:p>
             <a:pPr rtl="1" algn="ctr">
               <a:lnSpc>
-                <a:spcPct val="100000"/>
-              </a:lnSpc>
-              <a:spcBef>
-                <a:spcPts val="0"/>
-              </a:spcBef>
-              <a:spcAft>
-                <a:spcPts val="0"/>
-              </a:spcAft>
-            </a:pPr>
-            <a:r>
-              <a:rPr sz="1450" b="1">
+                <a:spcPct val="105000"/>
+              </a:lnSpc>
+              <a:spcBef>
+                <a:spcPts val="0"/>
+              </a:spcBef>
+              <a:spcAft>
+                <a:spcPts val="0"/>
+              </a:spcAft>
+            </a:pPr>
+            <a:r>
+              <a:rPr sz="1350" b="1">
                 <a:solidFill>
                   <a:srgbClr val="FFFFFF"/>
                 </a:solidFill>
@@ -52201,6 +51845,30 @@
                 <a:cs typeface="IRANSans"/>
                 <a:ea typeface="IRANSans"/>
               </a:rPr>
+              <a:t>موج ۱ · کشاورزی</a:t>
+            </a:r>
+          </a:p>
+          <a:p>
+            <a:pPr rtl="1" algn="ctr">
+              <a:lnSpc>
+                <a:spcPct val="110000"/>
+              </a:lnSpc>
+              <a:spcBef>
+                <a:spcPts val="0"/>
+              </a:spcBef>
+              <a:spcAft>
+                <a:spcPts val="0"/>
+              </a:spcAft>
+            </a:pPr>
+            <a:r>
+              <a:rPr sz="1100" b="0">
+                <a:solidFill>
+                  <a:srgbClr val="FFFFFF"/>
+                </a:solidFill>
+                <a:latin typeface="IRANSans"/>
+                <a:cs typeface="IRANSans"/>
+                <a:ea typeface="IRANSans"/>
+              </a:rPr>
               <a:t>تا ۱۷۵۰</a:t>
             </a:r>
           </a:p>
@@ -52208,14 +51876,14 @@
       </p:sp>
       <p:sp>
         <p:nvSpPr>
-          <p:cNvPr id="20" name="Rounded Rectangle 19"/>
+          <p:cNvPr id="10" name="Rounded Rectangle 9"/>
           <p:cNvSpPr/>
           <p:nvPr/>
         </p:nvSpPr>
         <p:spPr>
           <a:xfrm>
-            <a:off x="9933127" y="2542032"/>
-            <a:ext cx="1600200" cy="480060"/>
+            <a:off x="10308031" y="2322576"/>
+            <a:ext cx="1243584" cy="516636"/>
           </a:xfrm>
           <a:prstGeom prst="roundRect">
             <a:avLst>
@@ -52254,14 +51922,14 @@
       </p:sp>
       <p:sp>
         <p:nvSpPr>
-          <p:cNvPr id="21" name="TextBox 20"/>
+          <p:cNvPr id="11" name="TextBox 10"/>
           <p:cNvSpPr txBox="1"/>
           <p:nvPr/>
         </p:nvSpPr>
         <p:spPr>
           <a:xfrm>
-            <a:off x="10042855" y="2542032"/>
-            <a:ext cx="1380744" cy="480060"/>
+            <a:off x="10381183" y="2322576"/>
+            <a:ext cx="1097280" cy="516636"/>
           </a:xfrm>
           <a:prstGeom prst="rect">
             <a:avLst/>
@@ -52276,17 +51944,17 @@
           <a:p>
             <a:pPr rtl="1" algn="r">
               <a:lnSpc>
-                <a:spcPct val="105000"/>
-              </a:lnSpc>
-              <a:spcBef>
-                <a:spcPts val="0"/>
-              </a:spcBef>
-              <a:spcAft>
-                <a:spcPts val="0"/>
-              </a:spcAft>
-            </a:pPr>
-            <a:r>
-              <a:rPr sz="1450" b="1">
+                <a:spcPct val="108000"/>
+              </a:lnSpc>
+              <a:spcBef>
+                <a:spcPts val="0"/>
+              </a:spcBef>
+              <a:spcAft>
+                <a:spcPts val="0"/>
+              </a:spcAft>
+            </a:pPr>
+            <a:r>
+              <a:rPr sz="1250" b="1">
                 <a:solidFill>
                   <a:srgbClr val="1F2D38"/>
                 </a:solidFill>
@@ -52310,7 +51978,7 @@
               </a:spcAft>
             </a:pPr>
             <a:r>
-              <a:rPr sz="1200" b="0">
+              <a:rPr sz="1050" b="0">
                 <a:solidFill>
                   <a:srgbClr val="5A6B77"/>
                 </a:solidFill>
@@ -52318,21 +51986,21 @@
                 <a:cs typeface="IRANSans"/>
                 <a:ea typeface="IRANSans"/>
               </a:rPr>
-              <a:t>استادـشاگردی، تجربه‌محور</a:t>
-            </a:r>
-          </a:p>
-        </p:txBody>
-      </p:sp>
-      <p:sp>
-        <p:nvSpPr>
-          <p:cNvPr id="22" name="TextBox 21"/>
+              <a:t>استادـشاگردی</a:t>
+            </a:r>
+          </a:p>
+        </p:txBody>
+      </p:sp>
+      <p:sp>
+        <p:nvSpPr>
+          <p:cNvPr id="12" name="TextBox 11"/>
           <p:cNvSpPr txBox="1"/>
           <p:nvPr/>
         </p:nvSpPr>
         <p:spPr>
           <a:xfrm>
-            <a:off x="10042855" y="3067812"/>
-            <a:ext cx="1380744" cy="480060"/>
+            <a:off x="10381183" y="2884932"/>
+            <a:ext cx="1097280" cy="516636"/>
           </a:xfrm>
           <a:prstGeom prst="rect">
             <a:avLst/>
@@ -52347,17 +52015,17 @@
           <a:p>
             <a:pPr rtl="1" algn="r">
               <a:lnSpc>
-                <a:spcPct val="105000"/>
-              </a:lnSpc>
-              <a:spcBef>
-                <a:spcPts val="0"/>
-              </a:spcBef>
-              <a:spcAft>
-                <a:spcPts val="0"/>
-              </a:spcAft>
-            </a:pPr>
-            <a:r>
-              <a:rPr sz="1450" b="1">
+                <a:spcPct val="108000"/>
+              </a:lnSpc>
+              <a:spcBef>
+                <a:spcPts val="0"/>
+              </a:spcBef>
+              <a:spcAft>
+                <a:spcPts val="0"/>
+              </a:spcAft>
+            </a:pPr>
+            <a:r>
+              <a:rPr sz="1250" b="1">
                 <a:solidFill>
                   <a:srgbClr val="1F2D38"/>
                 </a:solidFill>
@@ -52381,7 +52049,7 @@
               </a:spcAft>
             </a:pPr>
             <a:r>
-              <a:rPr sz="1200" b="0">
+              <a:rPr sz="1050" b="0">
                 <a:solidFill>
                   <a:srgbClr val="5A6B77"/>
                 </a:solidFill>
@@ -52389,21 +52057,21 @@
                 <a:cs typeface="IRANSans"/>
                 <a:ea typeface="IRANSans"/>
               </a:rPr>
-              <a:t>انتقال مهارت در کارگاه</a:t>
-            </a:r>
-          </a:p>
-        </p:txBody>
-      </p:sp>
-      <p:sp>
-        <p:nvSpPr>
-          <p:cNvPr id="23" name="Rounded Rectangle 22"/>
+              <a:t>مهارت در کارگاه</a:t>
+            </a:r>
+          </a:p>
+        </p:txBody>
+      </p:sp>
+      <p:sp>
+        <p:nvSpPr>
+          <p:cNvPr id="13" name="Rounded Rectangle 12"/>
           <p:cNvSpPr/>
           <p:nvPr/>
         </p:nvSpPr>
         <p:spPr>
           <a:xfrm>
-            <a:off x="6412687" y="1975104"/>
-            <a:ext cx="3246120" cy="3712463"/>
+            <a:off x="7473391" y="1517904"/>
+            <a:ext cx="2615184" cy="4133087"/>
           </a:xfrm>
           <a:prstGeom prst="roundRect">
             <a:avLst>
@@ -52444,18 +52112,18 @@
       </p:sp>
       <p:sp>
         <p:nvSpPr>
-          <p:cNvPr id="24" name="Rounded Rectangle 23"/>
+          <p:cNvPr id="14" name="Rounded Rectangle 13"/>
           <p:cNvSpPr/>
           <p:nvPr/>
         </p:nvSpPr>
         <p:spPr>
           <a:xfrm>
-            <a:off x="6412687" y="1975104"/>
-            <a:ext cx="3246120" cy="457200"/>
+            <a:off x="7473391" y="1517904"/>
+            <a:ext cx="2615184" cy="713232"/>
           </a:xfrm>
           <a:prstGeom prst="roundRect">
             <a:avLst>
-              <a:gd name="adj" fmla="val 12000"/>
+              <a:gd name="adj" fmla="val 10000"/>
             </a:avLst>
           </a:prstGeom>
           <a:solidFill>
@@ -52490,14 +52158,14 @@
       </p:sp>
       <p:sp>
         <p:nvSpPr>
-          <p:cNvPr id="25" name="Rectangle 24"/>
+          <p:cNvPr id="15" name="Rectangle 14"/>
           <p:cNvSpPr/>
           <p:nvPr/>
         </p:nvSpPr>
         <p:spPr>
           <a:xfrm>
-            <a:off x="6412687" y="2286000"/>
-            <a:ext cx="3246120" cy="146304"/>
+            <a:off x="7473391" y="2084832"/>
+            <a:ext cx="2615184" cy="146304"/>
           </a:xfrm>
           <a:prstGeom prst="rect">
             <a:avLst/>
@@ -52534,14 +52202,14 @@
       </p:sp>
       <p:sp>
         <p:nvSpPr>
-          <p:cNvPr id="26" name="TextBox 25"/>
+          <p:cNvPr id="16" name="TextBox 15"/>
           <p:cNvSpPr txBox="1"/>
           <p:nvPr/>
         </p:nvSpPr>
         <p:spPr>
           <a:xfrm>
-            <a:off x="6412687" y="1975104"/>
-            <a:ext cx="3246120" cy="457200"/>
+            <a:off x="7528255" y="1517904"/>
+            <a:ext cx="2505456" cy="713232"/>
           </a:xfrm>
           <a:prstGeom prst="rect">
             <a:avLst/>
@@ -52556,17 +52224,17 @@
           <a:p>
             <a:pPr rtl="1" algn="ctr">
               <a:lnSpc>
-                <a:spcPct val="100000"/>
-              </a:lnSpc>
-              <a:spcBef>
-                <a:spcPts val="0"/>
-              </a:spcBef>
-              <a:spcAft>
-                <a:spcPts val="0"/>
-              </a:spcAft>
-            </a:pPr>
-            <a:r>
-              <a:rPr sz="1450" b="1">
+                <a:spcPct val="105000"/>
+              </a:lnSpc>
+              <a:spcBef>
+                <a:spcPts val="0"/>
+              </a:spcBef>
+              <a:spcAft>
+                <a:spcPts val="0"/>
+              </a:spcAft>
+            </a:pPr>
+            <a:r>
+              <a:rPr sz="1350" b="1">
                 <a:solidFill>
                   <a:srgbClr val="FFFFFF"/>
                 </a:solidFill>
@@ -52574,21 +52242,45 @@
                 <a:cs typeface="IRANSans"/>
                 <a:ea typeface="IRANSans"/>
               </a:rPr>
-              <a:t>۱۹۱۱ تا ۱۹۷۰</a:t>
-            </a:r>
-          </a:p>
-        </p:txBody>
-      </p:sp>
-      <p:sp>
-        <p:nvSpPr>
-          <p:cNvPr id="27" name="Rounded Rectangle 26"/>
+              <a:t>موج ۲ · صنعتی</a:t>
+            </a:r>
+          </a:p>
+          <a:p>
+            <a:pPr rtl="1" algn="ctr">
+              <a:lnSpc>
+                <a:spcPct val="110000"/>
+              </a:lnSpc>
+              <a:spcBef>
+                <a:spcPts val="0"/>
+              </a:spcBef>
+              <a:spcAft>
+                <a:spcPts val="0"/>
+              </a:spcAft>
+            </a:pPr>
+            <a:r>
+              <a:rPr sz="1100" b="0">
+                <a:solidFill>
+                  <a:srgbClr val="FFFFFF"/>
+                </a:solidFill>
+                <a:latin typeface="IRANSans"/>
+                <a:cs typeface="IRANSans"/>
+                <a:ea typeface="IRANSans"/>
+              </a:rPr>
+              <a:t>۱۷۵۰ ـ ۱۹۵۰</a:t>
+            </a:r>
+          </a:p>
+        </p:txBody>
+      </p:sp>
+      <p:sp>
+        <p:nvSpPr>
+          <p:cNvPr id="17" name="Rounded Rectangle 16"/>
           <p:cNvSpPr/>
           <p:nvPr/>
         </p:nvSpPr>
         <p:spPr>
           <a:xfrm>
-            <a:off x="6504127" y="2542032"/>
-            <a:ext cx="3063240" cy="480060"/>
+            <a:off x="7546543" y="2322576"/>
+            <a:ext cx="2468880" cy="516636"/>
           </a:xfrm>
           <a:prstGeom prst="roundRect">
             <a:avLst>
@@ -52627,14 +52319,14 @@
       </p:sp>
       <p:sp>
         <p:nvSpPr>
-          <p:cNvPr id="28" name="TextBox 27"/>
+          <p:cNvPr id="18" name="TextBox 17"/>
           <p:cNvSpPr txBox="1"/>
           <p:nvPr/>
         </p:nvSpPr>
         <p:spPr>
           <a:xfrm>
-            <a:off x="6613855" y="2542032"/>
-            <a:ext cx="2843784" cy="480060"/>
+            <a:off x="7619695" y="2322576"/>
+            <a:ext cx="2322576" cy="516636"/>
           </a:xfrm>
           <a:prstGeom prst="rect">
             <a:avLst/>
@@ -52649,17 +52341,17 @@
           <a:p>
             <a:pPr rtl="1" algn="r">
               <a:lnSpc>
-                <a:spcPct val="105000"/>
-              </a:lnSpc>
-              <a:spcBef>
-                <a:spcPts val="0"/>
-              </a:spcBef>
-              <a:spcAft>
-                <a:spcPts val="0"/>
-              </a:spcAft>
-            </a:pPr>
-            <a:r>
-              <a:rPr sz="1450" b="1">
+                <a:spcPct val="108000"/>
+              </a:lnSpc>
+              <a:spcBef>
+                <a:spcPts val="0"/>
+              </a:spcBef>
+              <a:spcAft>
+                <a:spcPts val="0"/>
+              </a:spcAft>
+            </a:pPr>
+            <a:r>
+              <a:rPr sz="1250" b="1">
                 <a:solidFill>
                   <a:srgbClr val="1F2D38"/>
                 </a:solidFill>
@@ -52683,7 +52375,7 @@
               </a:spcAft>
             </a:pPr>
             <a:r>
-              <a:rPr sz="1200" b="0">
+              <a:rPr sz="1050" b="0">
                 <a:solidFill>
                   <a:srgbClr val="5A6B77"/>
                 </a:solidFill>
@@ -52691,21 +52383,21 @@
                 <a:cs typeface="IRANSans"/>
                 <a:ea typeface="IRANSans"/>
               </a:rPr>
-              <a:t>بهترین راه انجام کار، زمان‌سنجی</a:t>
-            </a:r>
-          </a:p>
-        </p:txBody>
-      </p:sp>
-      <p:sp>
-        <p:nvSpPr>
-          <p:cNvPr id="29" name="TextBox 28"/>
+              <a:t>بهترین راه انجام کار</a:t>
+            </a:r>
+          </a:p>
+        </p:txBody>
+      </p:sp>
+      <p:sp>
+        <p:nvSpPr>
+          <p:cNvPr id="19" name="TextBox 18"/>
           <p:cNvSpPr txBox="1"/>
           <p:nvPr/>
         </p:nvSpPr>
         <p:spPr>
           <a:xfrm>
-            <a:off x="6613855" y="3067812"/>
-            <a:ext cx="2843784" cy="480060"/>
+            <a:off x="7619695" y="2884932"/>
+            <a:ext cx="2322576" cy="516636"/>
           </a:xfrm>
           <a:prstGeom prst="rect">
             <a:avLst/>
@@ -52720,17 +52412,17 @@
           <a:p>
             <a:pPr rtl="1" algn="r">
               <a:lnSpc>
-                <a:spcPct val="105000"/>
-              </a:lnSpc>
-              <a:spcBef>
-                <a:spcPts val="0"/>
-              </a:spcBef>
-              <a:spcAft>
-                <a:spcPts val="0"/>
-              </a:spcAft>
-            </a:pPr>
-            <a:r>
-              <a:rPr sz="1450" b="1">
+                <a:spcPct val="108000"/>
+              </a:lnSpc>
+              <a:spcBef>
+                <a:spcPts val="0"/>
+              </a:spcBef>
+              <a:spcAft>
+                <a:spcPts val="0"/>
+              </a:spcAft>
+            </a:pPr>
+            <a:r>
+              <a:rPr sz="1250" b="1">
                 <a:solidFill>
                   <a:srgbClr val="1F2D38"/>
                 </a:solidFill>
@@ -52754,7 +52446,7 @@
               </a:spcAft>
             </a:pPr>
             <a:r>
-              <a:rPr sz="1200" b="0">
+              <a:rPr sz="1050" b="0">
                 <a:solidFill>
                   <a:srgbClr val="5A6B77"/>
                 </a:solidFill>
@@ -52769,14 +52461,14 @@
       </p:sp>
       <p:sp>
         <p:nvSpPr>
-          <p:cNvPr id="30" name="Rounded Rectangle 29"/>
+          <p:cNvPr id="20" name="Rounded Rectangle 19"/>
           <p:cNvSpPr/>
           <p:nvPr/>
         </p:nvSpPr>
         <p:spPr>
           <a:xfrm>
-            <a:off x="6504127" y="3593592"/>
-            <a:ext cx="3063240" cy="480060"/>
+            <a:off x="7546543" y="3447288"/>
+            <a:ext cx="2468880" cy="516636"/>
           </a:xfrm>
           <a:prstGeom prst="roundRect">
             <a:avLst>
@@ -52815,14 +52507,14 @@
       </p:sp>
       <p:sp>
         <p:nvSpPr>
-          <p:cNvPr id="31" name="TextBox 30"/>
+          <p:cNvPr id="21" name="TextBox 20"/>
           <p:cNvSpPr txBox="1"/>
           <p:nvPr/>
         </p:nvSpPr>
         <p:spPr>
           <a:xfrm>
-            <a:off x="6613855" y="3593592"/>
-            <a:ext cx="2843784" cy="480060"/>
+            <a:off x="7619695" y="3447288"/>
+            <a:ext cx="2322576" cy="516636"/>
           </a:xfrm>
           <a:prstGeom prst="rect">
             <a:avLst/>
@@ -52837,17 +52529,17 @@
           <a:p>
             <a:pPr rtl="1" algn="r">
               <a:lnSpc>
-                <a:spcPct val="105000"/>
-              </a:lnSpc>
-              <a:spcBef>
-                <a:spcPts val="0"/>
-              </a:spcBef>
-              <a:spcAft>
-                <a:spcPts val="0"/>
-              </a:spcAft>
-            </a:pPr>
-            <a:r>
-              <a:rPr sz="1450" b="1">
+                <a:spcPct val="108000"/>
+              </a:lnSpc>
+              <a:spcBef>
+                <a:spcPts val="0"/>
+              </a:spcBef>
+              <a:spcAft>
+                <a:spcPts val="0"/>
+              </a:spcAft>
+            </a:pPr>
+            <a:r>
+              <a:rPr sz="1250" b="1">
                 <a:solidFill>
                   <a:srgbClr val="1F2D38"/>
                 </a:solidFill>
@@ -52871,7 +52563,7 @@
               </a:spcAft>
             </a:pPr>
             <a:r>
-              <a:rPr sz="1200" b="0">
+              <a:rPr sz="1050" b="0">
                 <a:solidFill>
                   <a:srgbClr val="5A6B77"/>
                 </a:solidFill>
@@ -52879,21 +52571,21 @@
                 <a:cs typeface="IRANSans"/>
                 <a:ea typeface="IRANSans"/>
               </a:rPr>
-              <a:t>سلسله‌مراتب، قاعده، غیرشخصی بودن</a:t>
-            </a:r>
-          </a:p>
-        </p:txBody>
-      </p:sp>
-      <p:sp>
-        <p:nvSpPr>
-          <p:cNvPr id="32" name="TextBox 31"/>
+              <a:t>سلسله‌مراتب، قاعده، غیرشخصی</a:t>
+            </a:r>
+          </a:p>
+        </p:txBody>
+      </p:sp>
+      <p:sp>
+        <p:nvSpPr>
+          <p:cNvPr id="22" name="TextBox 21"/>
           <p:cNvSpPr txBox="1"/>
           <p:nvPr/>
         </p:nvSpPr>
         <p:spPr>
           <a:xfrm>
-            <a:off x="6613855" y="4119372"/>
-            <a:ext cx="2843784" cy="480060"/>
+            <a:off x="7619695" y="4009644"/>
+            <a:ext cx="2322576" cy="516636"/>
           </a:xfrm>
           <a:prstGeom prst="rect">
             <a:avLst/>
@@ -52908,17 +52600,17 @@
           <a:p>
             <a:pPr rtl="1" algn="r">
               <a:lnSpc>
-                <a:spcPct val="105000"/>
-              </a:lnSpc>
-              <a:spcBef>
-                <a:spcPts val="0"/>
-              </a:spcBef>
-              <a:spcAft>
-                <a:spcPts val="0"/>
-              </a:spcAft>
-            </a:pPr>
-            <a:r>
-              <a:rPr sz="1450" b="1">
+                <a:spcPct val="108000"/>
+              </a:lnSpc>
+              <a:spcBef>
+                <a:spcPts val="0"/>
+              </a:spcBef>
+              <a:spcAft>
+                <a:spcPts val="0"/>
+              </a:spcAft>
+            </a:pPr>
+            <a:r>
+              <a:rPr sz="1250" b="1">
                 <a:solidFill>
                   <a:srgbClr val="1F2D38"/>
                 </a:solidFill>
@@ -52942,7 +52634,7 @@
               </a:spcAft>
             </a:pPr>
             <a:r>
-              <a:rPr sz="1200" b="0">
+              <a:rPr sz="1050" b="0">
                 <a:solidFill>
                   <a:srgbClr val="5A6B77"/>
                 </a:solidFill>
@@ -52957,14 +52649,14 @@
       </p:sp>
       <p:sp>
         <p:nvSpPr>
-          <p:cNvPr id="33" name="Rounded Rectangle 32"/>
+          <p:cNvPr id="23" name="Rounded Rectangle 22"/>
           <p:cNvSpPr/>
           <p:nvPr/>
         </p:nvSpPr>
         <p:spPr>
           <a:xfrm>
-            <a:off x="6504127" y="4645152"/>
-            <a:ext cx="3063240" cy="480060"/>
+            <a:off x="7546543" y="4572000"/>
+            <a:ext cx="2468880" cy="516636"/>
           </a:xfrm>
           <a:prstGeom prst="roundRect">
             <a:avLst>
@@ -53003,14 +52695,14 @@
       </p:sp>
       <p:sp>
         <p:nvSpPr>
-          <p:cNvPr id="34" name="TextBox 33"/>
+          <p:cNvPr id="24" name="TextBox 23"/>
           <p:cNvSpPr txBox="1"/>
           <p:nvPr/>
         </p:nvSpPr>
         <p:spPr>
           <a:xfrm>
-            <a:off x="6613855" y="4645152"/>
-            <a:ext cx="2843784" cy="480060"/>
+            <a:off x="7619695" y="4572000"/>
+            <a:ext cx="2322576" cy="516636"/>
           </a:xfrm>
           <a:prstGeom prst="rect">
             <a:avLst/>
@@ -53025,17 +52717,17 @@
           <a:p>
             <a:pPr rtl="1" algn="r">
               <a:lnSpc>
-                <a:spcPct val="105000"/>
-              </a:lnSpc>
-              <a:spcBef>
-                <a:spcPts val="0"/>
-              </a:spcBef>
-              <a:spcAft>
-                <a:spcPts val="0"/>
-              </a:spcAft>
-            </a:pPr>
-            <a:r>
-              <a:rPr sz="1450" b="1">
+                <a:spcPct val="108000"/>
+              </a:lnSpc>
+              <a:spcBef>
+                <a:spcPts val="0"/>
+              </a:spcBef>
+              <a:spcAft>
+                <a:spcPts val="0"/>
+              </a:spcAft>
+            </a:pPr>
+            <a:r>
+              <a:rPr sz="1250" b="1">
                 <a:solidFill>
                   <a:srgbClr val="1F2D38"/>
                 </a:solidFill>
@@ -53059,7 +52751,7 @@
               </a:spcAft>
             </a:pPr>
             <a:r>
-              <a:rPr sz="1200" b="0">
+              <a:rPr sz="1050" b="0">
                 <a:solidFill>
                   <a:srgbClr val="5A6B77"/>
                 </a:solidFill>
@@ -53074,14 +52766,14 @@
       </p:sp>
       <p:sp>
         <p:nvSpPr>
-          <p:cNvPr id="35" name="TextBox 34"/>
+          <p:cNvPr id="25" name="TextBox 24"/>
           <p:cNvSpPr txBox="1"/>
           <p:nvPr/>
         </p:nvSpPr>
         <p:spPr>
           <a:xfrm>
-            <a:off x="6613855" y="5170932"/>
-            <a:ext cx="2843784" cy="480060"/>
+            <a:off x="7619695" y="5134356"/>
+            <a:ext cx="2322576" cy="516636"/>
           </a:xfrm>
           <a:prstGeom prst="rect">
             <a:avLst/>
@@ -53096,17 +52788,17 @@
           <a:p>
             <a:pPr rtl="1" algn="r">
               <a:lnSpc>
-                <a:spcPct val="105000"/>
-              </a:lnSpc>
-              <a:spcBef>
-                <a:spcPts val="0"/>
-              </a:spcBef>
-              <a:spcAft>
-                <a:spcPts val="0"/>
-              </a:spcAft>
-            </a:pPr>
-            <a:r>
-              <a:rPr sz="1450" b="1">
+                <a:spcPct val="108000"/>
+              </a:lnSpc>
+              <a:spcBef>
+                <a:spcPts val="0"/>
+              </a:spcBef>
+              <a:spcAft>
+                <a:spcPts val="0"/>
+              </a:spcAft>
+            </a:pPr>
+            <a:r>
+              <a:rPr sz="1250" b="1">
                 <a:solidFill>
                   <a:srgbClr val="1F2D38"/>
                 </a:solidFill>
@@ -53114,7 +52806,7 @@
                 <a:cs typeface="IRANSans"/>
                 <a:ea typeface="IRANSans"/>
               </a:rPr>
-              <a:t>نگرش سیستمی و اقتضایی ۱۹۷۰</a:t>
+              <a:t>سیستمی و اقتضایی ۱۹۷۰</a:t>
             </a:r>
           </a:p>
           <a:p>
@@ -53130,7 +52822,7 @@
               </a:spcAft>
             </a:pPr>
             <a:r>
-              <a:rPr sz="1200" b="0">
+              <a:rPr sz="1050" b="0">
                 <a:solidFill>
                   <a:srgbClr val="5A6B77"/>
                 </a:solidFill>
@@ -53138,21 +52830,21 @@
                 <a:cs typeface="IRANSans"/>
                 <a:ea typeface="IRANSans"/>
               </a:rPr>
-              <a:t>یک نسخه برای همه وجود ندارد</a:t>
-            </a:r>
-          </a:p>
-        </p:txBody>
-      </p:sp>
-      <p:sp>
-        <p:nvSpPr>
-          <p:cNvPr id="36" name="Rounded Rectangle 35"/>
+              <a:t>یک نسخه برای همه نیست</a:t>
+            </a:r>
+          </a:p>
+        </p:txBody>
+      </p:sp>
+      <p:sp>
+        <p:nvSpPr>
+          <p:cNvPr id="26" name="Rounded Rectangle 25"/>
           <p:cNvSpPr/>
           <p:nvPr/>
         </p:nvSpPr>
         <p:spPr>
           <a:xfrm>
-            <a:off x="3212287" y="1975104"/>
-            <a:ext cx="3017520" cy="3712463"/>
+            <a:off x="4931359" y="1517904"/>
+            <a:ext cx="2395728" cy="4133087"/>
           </a:xfrm>
           <a:prstGeom prst="roundRect">
             <a:avLst>
@@ -53193,18 +52885,18 @@
       </p:sp>
       <p:sp>
         <p:nvSpPr>
-          <p:cNvPr id="37" name="Rounded Rectangle 36"/>
+          <p:cNvPr id="27" name="Rounded Rectangle 26"/>
           <p:cNvSpPr/>
           <p:nvPr/>
         </p:nvSpPr>
         <p:spPr>
           <a:xfrm>
-            <a:off x="3212287" y="1975104"/>
-            <a:ext cx="3017520" cy="457200"/>
+            <a:off x="4931359" y="1517904"/>
+            <a:ext cx="2395728" cy="713232"/>
           </a:xfrm>
           <a:prstGeom prst="roundRect">
             <a:avLst>
-              <a:gd name="adj" fmla="val 12000"/>
+              <a:gd name="adj" fmla="val 10000"/>
             </a:avLst>
           </a:prstGeom>
           <a:solidFill>
@@ -53239,14 +52931,14 @@
       </p:sp>
       <p:sp>
         <p:nvSpPr>
-          <p:cNvPr id="38" name="Rectangle 37"/>
+          <p:cNvPr id="28" name="Rectangle 27"/>
           <p:cNvSpPr/>
           <p:nvPr/>
         </p:nvSpPr>
         <p:spPr>
           <a:xfrm>
-            <a:off x="3212287" y="2286000"/>
-            <a:ext cx="3017520" cy="146304"/>
+            <a:off x="4931359" y="2084832"/>
+            <a:ext cx="2395728" cy="146304"/>
           </a:xfrm>
           <a:prstGeom prst="rect">
             <a:avLst/>
@@ -53283,14 +52975,14 @@
       </p:sp>
       <p:sp>
         <p:nvSpPr>
-          <p:cNvPr id="39" name="TextBox 38"/>
+          <p:cNvPr id="29" name="TextBox 28"/>
           <p:cNvSpPr txBox="1"/>
           <p:nvPr/>
         </p:nvSpPr>
         <p:spPr>
           <a:xfrm>
-            <a:off x="3212287" y="1975104"/>
-            <a:ext cx="3017520" cy="457200"/>
+            <a:off x="4986223" y="1517904"/>
+            <a:ext cx="2286000" cy="713232"/>
           </a:xfrm>
           <a:prstGeom prst="rect">
             <a:avLst/>
@@ -53305,17 +52997,17 @@
           <a:p>
             <a:pPr rtl="1" algn="ctr">
               <a:lnSpc>
-                <a:spcPct val="100000"/>
-              </a:lnSpc>
-              <a:spcBef>
-                <a:spcPts val="0"/>
-              </a:spcBef>
-              <a:spcAft>
-                <a:spcPts val="0"/>
-              </a:spcAft>
-            </a:pPr>
-            <a:r>
-              <a:rPr sz="1450" b="1">
+                <a:spcPct val="105000"/>
+              </a:lnSpc>
+              <a:spcBef>
+                <a:spcPts val="0"/>
+              </a:spcBef>
+              <a:spcAft>
+                <a:spcPts val="0"/>
+              </a:spcAft>
+            </a:pPr>
+            <a:r>
+              <a:rPr sz="1350" b="1">
                 <a:solidFill>
                   <a:srgbClr val="FFFFFF"/>
                 </a:solidFill>
@@ -53323,21 +53015,45 @@
                 <a:cs typeface="IRANSans"/>
                 <a:ea typeface="IRANSans"/>
               </a:rPr>
-              <a:t>۱۹۸۰ تا ۲۰۱۰</a:t>
-            </a:r>
-          </a:p>
-        </p:txBody>
-      </p:sp>
-      <p:sp>
-        <p:nvSpPr>
-          <p:cNvPr id="40" name="Rounded Rectangle 39"/>
+              <a:t>موج ۳ · دانش</a:t>
+            </a:r>
+          </a:p>
+          <a:p>
+            <a:pPr rtl="1" algn="ctr">
+              <a:lnSpc>
+                <a:spcPct val="110000"/>
+              </a:lnSpc>
+              <a:spcBef>
+                <a:spcPts val="0"/>
+              </a:spcBef>
+              <a:spcAft>
+                <a:spcPts val="0"/>
+              </a:spcAft>
+            </a:pPr>
+            <a:r>
+              <a:rPr sz="1100" b="0">
+                <a:solidFill>
+                  <a:srgbClr val="FFFFFF"/>
+                </a:solidFill>
+                <a:latin typeface="IRANSans"/>
+                <a:cs typeface="IRANSans"/>
+                <a:ea typeface="IRANSans"/>
+              </a:rPr>
+              <a:t>۱۹۵۰ ـ ۲۰۱۰</a:t>
+            </a:r>
+          </a:p>
+        </p:txBody>
+      </p:sp>
+      <p:sp>
+        <p:nvSpPr>
+          <p:cNvPr id="30" name="Rounded Rectangle 29"/>
           <p:cNvSpPr/>
           <p:nvPr/>
         </p:nvSpPr>
         <p:spPr>
           <a:xfrm>
-            <a:off x="3303727" y="2542032"/>
-            <a:ext cx="2834640" cy="480060"/>
+            <a:off x="5004511" y="2322576"/>
+            <a:ext cx="2249424" cy="516636"/>
           </a:xfrm>
           <a:prstGeom prst="roundRect">
             <a:avLst>
@@ -53376,14 +53092,14 @@
       </p:sp>
       <p:sp>
         <p:nvSpPr>
-          <p:cNvPr id="41" name="TextBox 40"/>
+          <p:cNvPr id="31" name="TextBox 30"/>
           <p:cNvSpPr txBox="1"/>
           <p:nvPr/>
         </p:nvSpPr>
         <p:spPr>
           <a:xfrm>
-            <a:off x="3413455" y="2542032"/>
-            <a:ext cx="2615184" cy="480060"/>
+            <a:off x="5077663" y="2322576"/>
+            <a:ext cx="2103120" cy="516636"/>
           </a:xfrm>
           <a:prstGeom prst="rect">
             <a:avLst/>
@@ -53398,17 +53114,17 @@
           <a:p>
             <a:pPr rtl="1" algn="r">
               <a:lnSpc>
-                <a:spcPct val="105000"/>
-              </a:lnSpc>
-              <a:spcBef>
-                <a:spcPts val="0"/>
-              </a:spcBef>
-              <a:spcAft>
-                <a:spcPts val="0"/>
-              </a:spcAft>
-            </a:pPr>
-            <a:r>
-              <a:rPr sz="1450" b="1">
+                <a:spcPct val="108000"/>
+              </a:lnSpc>
+              <a:spcBef>
+                <a:spcPts val="0"/>
+              </a:spcBef>
+              <a:spcAft>
+                <a:spcPts val="0"/>
+              </a:spcAft>
+            </a:pPr>
+            <a:r>
+              <a:rPr sz="1250" b="1">
                 <a:solidFill>
                   <a:srgbClr val="1F2D38"/>
                 </a:solidFill>
@@ -53416,7 +53132,7 @@
                 <a:cs typeface="IRANSans"/>
                 <a:ea typeface="IRANSans"/>
               </a:rPr>
-              <a:t>مدیریت کیفیت جامع ۱۹۸۰</a:t>
+              <a:t>کیفیت جامع — دهه ۱۹۸۰</a:t>
             </a:r>
           </a:p>
           <a:p>
@@ -53432,7 +53148,7 @@
               </a:spcAft>
             </a:pPr>
             <a:r>
-              <a:rPr sz="1200" b="0">
+              <a:rPr sz="1050" b="0">
                 <a:solidFill>
                   <a:srgbClr val="5A6B77"/>
                 </a:solidFill>
@@ -53447,14 +53163,14 @@
       </p:sp>
       <p:sp>
         <p:nvSpPr>
-          <p:cNvPr id="42" name="TextBox 41"/>
+          <p:cNvPr id="32" name="TextBox 31"/>
           <p:cNvSpPr txBox="1"/>
           <p:nvPr/>
         </p:nvSpPr>
         <p:spPr>
           <a:xfrm>
-            <a:off x="3413455" y="3067812"/>
-            <a:ext cx="2615184" cy="480060"/>
+            <a:off x="5077663" y="2884932"/>
+            <a:ext cx="2103120" cy="516636"/>
           </a:xfrm>
           <a:prstGeom prst="rect">
             <a:avLst/>
@@ -53469,17 +53185,17 @@
           <a:p>
             <a:pPr rtl="1" algn="r">
               <a:lnSpc>
-                <a:spcPct val="105000"/>
-              </a:lnSpc>
-              <a:spcBef>
-                <a:spcPts val="0"/>
-              </a:spcBef>
-              <a:spcAft>
-                <a:spcPts val="0"/>
-              </a:spcAft>
-            </a:pPr>
-            <a:r>
-              <a:rPr sz="1450" b="1">
+                <a:spcPct val="108000"/>
+              </a:lnSpc>
+              <a:spcBef>
+                <a:spcPts val="0"/>
+              </a:spcBef>
+              <a:spcAft>
+                <a:spcPts val="0"/>
+              </a:spcAft>
+            </a:pPr>
+            <a:r>
+              <a:rPr sz="1250" b="1">
                 <a:solidFill>
                   <a:srgbClr val="1F2D38"/>
                 </a:solidFill>
@@ -53503,7 +53219,7 @@
               </a:spcAft>
             </a:pPr>
             <a:r>
-              <a:rPr sz="1200" b="0">
+              <a:rPr sz="1050" b="0">
                 <a:solidFill>
                   <a:srgbClr val="5A6B77"/>
                 </a:solidFill>
@@ -53518,14 +53234,14 @@
       </p:sp>
       <p:sp>
         <p:nvSpPr>
-          <p:cNvPr id="43" name="Rounded Rectangle 42"/>
+          <p:cNvPr id="33" name="Rounded Rectangle 32"/>
           <p:cNvSpPr/>
           <p:nvPr/>
         </p:nvSpPr>
         <p:spPr>
           <a:xfrm>
-            <a:off x="3303727" y="3593592"/>
-            <a:ext cx="2834640" cy="480060"/>
+            <a:off x="5004511" y="3447288"/>
+            <a:ext cx="2249424" cy="516636"/>
           </a:xfrm>
           <a:prstGeom prst="roundRect">
             <a:avLst>
@@ -53564,14 +53280,14 @@
       </p:sp>
       <p:sp>
         <p:nvSpPr>
-          <p:cNvPr id="44" name="TextBox 43"/>
+          <p:cNvPr id="34" name="TextBox 33"/>
           <p:cNvSpPr txBox="1"/>
           <p:nvPr/>
         </p:nvSpPr>
         <p:spPr>
           <a:xfrm>
-            <a:off x="3413455" y="3593592"/>
-            <a:ext cx="2615184" cy="480060"/>
+            <a:off x="5077663" y="3447288"/>
+            <a:ext cx="2103120" cy="516636"/>
           </a:xfrm>
           <a:prstGeom prst="rect">
             <a:avLst/>
@@ -53586,17 +53302,17 @@
           <a:p>
             <a:pPr rtl="1" algn="r">
               <a:lnSpc>
-                <a:spcPct val="105000"/>
-              </a:lnSpc>
-              <a:spcBef>
-                <a:spcPts val="0"/>
-              </a:spcBef>
-              <a:spcAft>
-                <a:spcPts val="0"/>
-              </a:spcAft>
-            </a:pPr>
-            <a:r>
-              <a:rPr sz="1450" b="1">
+                <a:spcPct val="108000"/>
+              </a:lnSpc>
+              <a:spcBef>
+                <a:spcPts val="0"/>
+              </a:spcBef>
+              <a:spcAft>
+                <a:spcPts val="0"/>
+              </a:spcAft>
+            </a:pPr>
+            <a:r>
+              <a:rPr sz="1250" b="1">
                 <a:solidFill>
                   <a:srgbClr val="1F2D38"/>
                 </a:solidFill>
@@ -53620,7 +53336,7 @@
               </a:spcAft>
             </a:pPr>
             <a:r>
-              <a:rPr sz="1200" b="0">
+              <a:rPr sz="1050" b="0">
                 <a:solidFill>
                   <a:srgbClr val="5A6B77"/>
                 </a:solidFill>
@@ -53635,14 +53351,14 @@
       </p:sp>
       <p:sp>
         <p:nvSpPr>
-          <p:cNvPr id="45" name="TextBox 44"/>
+          <p:cNvPr id="35" name="TextBox 34"/>
           <p:cNvSpPr txBox="1"/>
           <p:nvPr/>
         </p:nvSpPr>
         <p:spPr>
           <a:xfrm>
-            <a:off x="3413455" y="4119372"/>
-            <a:ext cx="2615184" cy="480060"/>
+            <a:off x="5077663" y="4009644"/>
+            <a:ext cx="2103120" cy="516636"/>
           </a:xfrm>
           <a:prstGeom prst="rect">
             <a:avLst/>
@@ -53657,17 +53373,17 @@
           <a:p>
             <a:pPr rtl="1" algn="r">
               <a:lnSpc>
-                <a:spcPct val="105000"/>
-              </a:lnSpc>
-              <a:spcBef>
-                <a:spcPts val="0"/>
-              </a:spcBef>
-              <a:spcAft>
-                <a:spcPts val="0"/>
-              </a:spcAft>
-            </a:pPr>
-            <a:r>
-              <a:rPr sz="1450" b="1">
+                <a:spcPct val="108000"/>
+              </a:lnSpc>
+              <a:spcBef>
+                <a:spcPts val="0"/>
+              </a:spcBef>
+              <a:spcAft>
+                <a:spcPts val="0"/>
+              </a:spcAft>
+            </a:pPr>
+            <a:r>
+              <a:rPr sz="1250" b="1">
                 <a:solidFill>
                   <a:srgbClr val="1F2D38"/>
                 </a:solidFill>
@@ -53691,7 +53407,7 @@
               </a:spcAft>
             </a:pPr>
             <a:r>
-              <a:rPr sz="1200" b="0">
+              <a:rPr sz="1050" b="0">
                 <a:solidFill>
                   <a:srgbClr val="5A6B77"/>
                 </a:solidFill>
@@ -53706,14 +53422,14 @@
       </p:sp>
       <p:sp>
         <p:nvSpPr>
-          <p:cNvPr id="46" name="Rounded Rectangle 45"/>
+          <p:cNvPr id="36" name="Rounded Rectangle 35"/>
           <p:cNvSpPr/>
           <p:nvPr/>
         </p:nvSpPr>
         <p:spPr>
           <a:xfrm>
-            <a:off x="3303727" y="4645152"/>
-            <a:ext cx="2834640" cy="480060"/>
+            <a:off x="5004511" y="4572000"/>
+            <a:ext cx="2249424" cy="516636"/>
           </a:xfrm>
           <a:prstGeom prst="roundRect">
             <a:avLst>
@@ -53752,14 +53468,14 @@
       </p:sp>
       <p:sp>
         <p:nvSpPr>
-          <p:cNvPr id="47" name="TextBox 46"/>
+          <p:cNvPr id="37" name="TextBox 36"/>
           <p:cNvSpPr txBox="1"/>
           <p:nvPr/>
         </p:nvSpPr>
         <p:spPr>
           <a:xfrm>
-            <a:off x="3413455" y="4645152"/>
-            <a:ext cx="2615184" cy="480060"/>
+            <a:off x="5077663" y="4572000"/>
+            <a:ext cx="2103120" cy="516636"/>
           </a:xfrm>
           <a:prstGeom prst="rect">
             <a:avLst/>
@@ -53774,17 +53490,17 @@
           <a:p>
             <a:pPr rtl="1" algn="r">
               <a:lnSpc>
-                <a:spcPct val="105000"/>
-              </a:lnSpc>
-              <a:spcBef>
-                <a:spcPts val="0"/>
-              </a:spcBef>
-              <a:spcAft>
-                <a:spcPts val="0"/>
-              </a:spcAft>
-            </a:pPr>
-            <a:r>
-              <a:rPr sz="1450" b="1">
+                <a:spcPct val="108000"/>
+              </a:lnSpc>
+              <a:spcBef>
+                <a:spcPts val="0"/>
+              </a:spcBef>
+              <a:spcAft>
+                <a:spcPts val="0"/>
+              </a:spcAft>
+            </a:pPr>
+            <a:r>
+              <a:rPr sz="1250" b="1">
                 <a:solidFill>
                   <a:srgbClr val="1F2D38"/>
                 </a:solidFill>
@@ -53808,7 +53524,7 @@
               </a:spcAft>
             </a:pPr>
             <a:r>
-              <a:rPr sz="1200" b="0">
+              <a:rPr sz="1050" b="0">
                 <a:solidFill>
                   <a:srgbClr val="5A6B77"/>
                 </a:solidFill>
@@ -53823,14 +53539,14 @@
       </p:sp>
       <p:sp>
         <p:nvSpPr>
-          <p:cNvPr id="48" name="Rounded Rectangle 47"/>
+          <p:cNvPr id="38" name="Rounded Rectangle 37"/>
           <p:cNvSpPr/>
           <p:nvPr/>
         </p:nvSpPr>
         <p:spPr>
           <a:xfrm>
-            <a:off x="11887" y="1975104"/>
-            <a:ext cx="3017520" cy="3712463"/>
+            <a:off x="2681935" y="1517904"/>
+            <a:ext cx="2103120" cy="4133087"/>
           </a:xfrm>
           <a:prstGeom prst="roundRect">
             <a:avLst>
@@ -53871,18 +53587,720 @@
       </p:sp>
       <p:sp>
         <p:nvSpPr>
-          <p:cNvPr id="49" name="Rounded Rectangle 48"/>
+          <p:cNvPr id="39" name="Rounded Rectangle 38"/>
           <p:cNvSpPr/>
           <p:nvPr/>
         </p:nvSpPr>
         <p:spPr>
           <a:xfrm>
-            <a:off x="11887" y="1975104"/>
-            <a:ext cx="3017520" cy="457200"/>
+            <a:off x="2681935" y="1517904"/>
+            <a:ext cx="2103120" cy="713232"/>
           </a:xfrm>
           <a:prstGeom prst="roundRect">
             <a:avLst>
-              <a:gd name="adj" fmla="val 12000"/>
+              <a:gd name="adj" fmla="val 10000"/>
+            </a:avLst>
+          </a:prstGeom>
+          <a:solidFill>
+            <a:srgbClr val="62B6CB"/>
+          </a:solidFill>
+          <a:ln>
+            <a:noFill/>
+          </a:ln>
+          <a:effectLst/>
+        </p:spPr>
+        <p:style>
+          <a:lnRef idx="1">
+            <a:schemeClr val="accent1"/>
+          </a:lnRef>
+          <a:fillRef idx="3">
+            <a:schemeClr val="accent1"/>
+          </a:fillRef>
+          <a:effectRef idx="2">
+            <a:schemeClr val="accent1"/>
+          </a:effectRef>
+          <a:fontRef idx="minor">
+            <a:schemeClr val="lt1"/>
+          </a:fontRef>
+        </p:style>
+        <p:txBody>
+          <a:bodyPr rtlCol="0" anchor="ctr" wrap="square"/>
+          <a:lstStyle/>
+          <a:p>
+            <a:pPr algn="ctr"/>
+          </a:p>
+        </p:txBody>
+      </p:sp>
+      <p:sp>
+        <p:nvSpPr>
+          <p:cNvPr id="40" name="Rectangle 39"/>
+          <p:cNvSpPr/>
+          <p:nvPr/>
+        </p:nvSpPr>
+        <p:spPr>
+          <a:xfrm>
+            <a:off x="2681935" y="2084832"/>
+            <a:ext cx="2103120" cy="146304"/>
+          </a:xfrm>
+          <a:prstGeom prst="rect">
+            <a:avLst/>
+          </a:prstGeom>
+          <a:solidFill>
+            <a:srgbClr val="62B6CB"/>
+          </a:solidFill>
+          <a:ln>
+            <a:noFill/>
+          </a:ln>
+          <a:effectLst/>
+        </p:spPr>
+        <p:style>
+          <a:lnRef idx="1">
+            <a:schemeClr val="accent1"/>
+          </a:lnRef>
+          <a:fillRef idx="3">
+            <a:schemeClr val="accent1"/>
+          </a:fillRef>
+          <a:effectRef idx="2">
+            <a:schemeClr val="accent1"/>
+          </a:effectRef>
+          <a:fontRef idx="minor">
+            <a:schemeClr val="lt1"/>
+          </a:fontRef>
+        </p:style>
+        <p:txBody>
+          <a:bodyPr rtlCol="0" anchor="ctr" wrap="square"/>
+          <a:lstStyle/>
+          <a:p>
+            <a:pPr algn="ctr"/>
+          </a:p>
+        </p:txBody>
+      </p:sp>
+      <p:sp>
+        <p:nvSpPr>
+          <p:cNvPr id="41" name="TextBox 40"/>
+          <p:cNvSpPr txBox="1"/>
+          <p:nvPr/>
+        </p:nvSpPr>
+        <p:spPr>
+          <a:xfrm>
+            <a:off x="2736799" y="1517904"/>
+            <a:ext cx="1993392" cy="713232"/>
+          </a:xfrm>
+          <a:prstGeom prst="rect">
+            <a:avLst/>
+          </a:prstGeom>
+          <a:noFill/>
+        </p:spPr>
+        <p:txBody>
+          <a:bodyPr wrap="square" lIns="36576" rIns="36576" tIns="0" bIns="0" anchor="ctr">
+            <a:spAutoFit/>
+          </a:bodyPr>
+          <a:lstStyle/>
+          <a:p>
+            <a:pPr rtl="1" algn="ctr">
+              <a:lnSpc>
+                <a:spcPct val="105000"/>
+              </a:lnSpc>
+              <a:spcBef>
+                <a:spcPts val="0"/>
+              </a:spcBef>
+              <a:spcAft>
+                <a:spcPts val="0"/>
+              </a:spcAft>
+            </a:pPr>
+            <a:r>
+              <a:rPr sz="1350" b="1">
+                <a:solidFill>
+                  <a:srgbClr val="FFFFFF"/>
+                </a:solidFill>
+                <a:latin typeface="IRANSans"/>
+                <a:cs typeface="IRANSans"/>
+                <a:ea typeface="IRANSans"/>
+              </a:rPr>
+              <a:t>موج ۴ · دیجیتال</a:t>
+            </a:r>
+          </a:p>
+          <a:p>
+            <a:pPr rtl="1" algn="ctr">
+              <a:lnSpc>
+                <a:spcPct val="110000"/>
+              </a:lnSpc>
+              <a:spcBef>
+                <a:spcPts val="0"/>
+              </a:spcBef>
+              <a:spcAft>
+                <a:spcPts val="0"/>
+              </a:spcAft>
+            </a:pPr>
+            <a:r>
+              <a:rPr sz="1100" b="0">
+                <a:solidFill>
+                  <a:srgbClr val="FFFFFF"/>
+                </a:solidFill>
+                <a:latin typeface="IRANSans"/>
+                <a:cs typeface="IRANSans"/>
+                <a:ea typeface="IRANSans"/>
+              </a:rPr>
+              <a:t>۲۰۱۱ ـ امروز</a:t>
+            </a:r>
+          </a:p>
+        </p:txBody>
+      </p:sp>
+      <p:sp>
+        <p:nvSpPr>
+          <p:cNvPr id="42" name="Rounded Rectangle 41"/>
+          <p:cNvSpPr/>
+          <p:nvPr/>
+        </p:nvSpPr>
+        <p:spPr>
+          <a:xfrm>
+            <a:off x="2755087" y="2322576"/>
+            <a:ext cx="1956816" cy="516636"/>
+          </a:xfrm>
+          <a:prstGeom prst="roundRect">
+            <a:avLst>
+              <a:gd name="adj" fmla="val 14000"/>
+            </a:avLst>
+          </a:prstGeom>
+          <a:solidFill>
+            <a:srgbClr val="ECF3F7"/>
+          </a:solidFill>
+          <a:ln>
+            <a:noFill/>
+          </a:ln>
+          <a:effectLst/>
+        </p:spPr>
+        <p:style>
+          <a:lnRef idx="1">
+            <a:schemeClr val="accent1"/>
+          </a:lnRef>
+          <a:fillRef idx="3">
+            <a:schemeClr val="accent1"/>
+          </a:fillRef>
+          <a:effectRef idx="2">
+            <a:schemeClr val="accent1"/>
+          </a:effectRef>
+          <a:fontRef idx="minor">
+            <a:schemeClr val="lt1"/>
+          </a:fontRef>
+        </p:style>
+        <p:txBody>
+          <a:bodyPr rtlCol="0" anchor="ctr" wrap="square"/>
+          <a:lstStyle/>
+          <a:p>
+            <a:pPr algn="ctr"/>
+          </a:p>
+        </p:txBody>
+      </p:sp>
+      <p:sp>
+        <p:nvSpPr>
+          <p:cNvPr id="43" name="TextBox 42"/>
+          <p:cNvSpPr txBox="1"/>
+          <p:nvPr/>
+        </p:nvSpPr>
+        <p:spPr>
+          <a:xfrm>
+            <a:off x="2828239" y="2322576"/>
+            <a:ext cx="1810512" cy="516636"/>
+          </a:xfrm>
+          <a:prstGeom prst="rect">
+            <a:avLst/>
+          </a:prstGeom>
+          <a:noFill/>
+        </p:spPr>
+        <p:txBody>
+          <a:bodyPr wrap="square" lIns="36576" rIns="36576" tIns="0" bIns="0" anchor="ctr">
+            <a:spAutoFit/>
+          </a:bodyPr>
+          <a:lstStyle/>
+          <a:p>
+            <a:pPr rtl="1" algn="r">
+              <a:lnSpc>
+                <a:spcPct val="108000"/>
+              </a:lnSpc>
+              <a:spcBef>
+                <a:spcPts val="0"/>
+              </a:spcBef>
+              <a:spcAft>
+                <a:spcPts val="0"/>
+              </a:spcAft>
+            </a:pPr>
+            <a:r>
+              <a:rPr sz="1250" b="1">
+                <a:solidFill>
+                  <a:srgbClr val="1F2D38"/>
+                </a:solidFill>
+                <a:latin typeface="IRANSans"/>
+                <a:cs typeface="IRANSans"/>
+                <a:ea typeface="IRANSans"/>
+              </a:rPr>
+              <a:t>صنعت ۴٫۰ — هانوفر ۲۰۱۱</a:t>
+            </a:r>
+          </a:p>
+          <a:p>
+            <a:pPr rtl="1" algn="r">
+              <a:lnSpc>
+                <a:spcPct val="112000"/>
+              </a:lnSpc>
+              <a:spcBef>
+                <a:spcPts val="0"/>
+              </a:spcBef>
+              <a:spcAft>
+                <a:spcPts val="0"/>
+              </a:spcAft>
+            </a:pPr>
+            <a:r>
+              <a:rPr sz="1050" b="0">
+                <a:solidFill>
+                  <a:srgbClr val="5A6B77"/>
+                </a:solidFill>
+                <a:latin typeface="IRANSans"/>
+                <a:cs typeface="IRANSans"/>
+                <a:ea typeface="IRANSans"/>
+              </a:rPr>
+              <a:t>اتصال ماشین، داده، خودکارسازی</a:t>
+            </a:r>
+          </a:p>
+        </p:txBody>
+      </p:sp>
+      <p:sp>
+        <p:nvSpPr>
+          <p:cNvPr id="44" name="TextBox 43"/>
+          <p:cNvSpPr txBox="1"/>
+          <p:nvPr/>
+        </p:nvSpPr>
+        <p:spPr>
+          <a:xfrm>
+            <a:off x="2828239" y="2884932"/>
+            <a:ext cx="1810512" cy="516636"/>
+          </a:xfrm>
+          <a:prstGeom prst="rect">
+            <a:avLst/>
+          </a:prstGeom>
+          <a:noFill/>
+        </p:spPr>
+        <p:txBody>
+          <a:bodyPr wrap="square" lIns="36576" rIns="36576" tIns="0" bIns="0" anchor="ctr">
+            <a:spAutoFit/>
+          </a:bodyPr>
+          <a:lstStyle/>
+          <a:p>
+            <a:pPr rtl="1" algn="r">
+              <a:lnSpc>
+                <a:spcPct val="108000"/>
+              </a:lnSpc>
+              <a:spcBef>
+                <a:spcPts val="0"/>
+              </a:spcBef>
+              <a:spcAft>
+                <a:spcPts val="0"/>
+              </a:spcAft>
+            </a:pPr>
+            <a:r>
+              <a:rPr sz="1250" b="1">
+                <a:solidFill>
+                  <a:srgbClr val="1F2D38"/>
+                </a:solidFill>
+                <a:latin typeface="IRANSans"/>
+                <a:cs typeface="IRANSans"/>
+                <a:ea typeface="IRANSans"/>
+              </a:rPr>
+              <a:t>سازمان داده‌محور</a:t>
+            </a:r>
+          </a:p>
+          <a:p>
+            <a:pPr rtl="1" algn="r">
+              <a:lnSpc>
+                <a:spcPct val="112000"/>
+              </a:lnSpc>
+              <a:spcBef>
+                <a:spcPts val="0"/>
+              </a:spcBef>
+              <a:spcAft>
+                <a:spcPts val="0"/>
+              </a:spcAft>
+            </a:pPr>
+            <a:r>
+              <a:rPr sz="1050" b="0">
+                <a:solidFill>
+                  <a:srgbClr val="5A6B77"/>
+                </a:solidFill>
+                <a:latin typeface="IRANSans"/>
+                <a:cs typeface="IRANSans"/>
+                <a:ea typeface="IRANSans"/>
+              </a:rPr>
+              <a:t>تصمیم بر پایه داده، نه حدس</a:t>
+            </a:r>
+          </a:p>
+        </p:txBody>
+      </p:sp>
+      <p:sp>
+        <p:nvSpPr>
+          <p:cNvPr id="45" name="Rounded Rectangle 44"/>
+          <p:cNvSpPr/>
+          <p:nvPr/>
+        </p:nvSpPr>
+        <p:spPr>
+          <a:xfrm>
+            <a:off x="2755087" y="3447288"/>
+            <a:ext cx="1956816" cy="516636"/>
+          </a:xfrm>
+          <a:prstGeom prst="roundRect">
+            <a:avLst>
+              <a:gd name="adj" fmla="val 14000"/>
+            </a:avLst>
+          </a:prstGeom>
+          <a:solidFill>
+            <a:srgbClr val="ECF3F7"/>
+          </a:solidFill>
+          <a:ln>
+            <a:noFill/>
+          </a:ln>
+          <a:effectLst/>
+        </p:spPr>
+        <p:style>
+          <a:lnRef idx="1">
+            <a:schemeClr val="accent1"/>
+          </a:lnRef>
+          <a:fillRef idx="3">
+            <a:schemeClr val="accent1"/>
+          </a:fillRef>
+          <a:effectRef idx="2">
+            <a:schemeClr val="accent1"/>
+          </a:effectRef>
+          <a:fontRef idx="minor">
+            <a:schemeClr val="lt1"/>
+          </a:fontRef>
+        </p:style>
+        <p:txBody>
+          <a:bodyPr rtlCol="0" anchor="ctr" wrap="square"/>
+          <a:lstStyle/>
+          <a:p>
+            <a:pPr algn="ctr"/>
+          </a:p>
+        </p:txBody>
+      </p:sp>
+      <p:sp>
+        <p:nvSpPr>
+          <p:cNvPr id="46" name="TextBox 45"/>
+          <p:cNvSpPr txBox="1"/>
+          <p:nvPr/>
+        </p:nvSpPr>
+        <p:spPr>
+          <a:xfrm>
+            <a:off x="2828239" y="3447288"/>
+            <a:ext cx="1810512" cy="516636"/>
+          </a:xfrm>
+          <a:prstGeom prst="rect">
+            <a:avLst/>
+          </a:prstGeom>
+          <a:noFill/>
+        </p:spPr>
+        <p:txBody>
+          <a:bodyPr wrap="square" lIns="36576" rIns="36576" tIns="0" bIns="0" anchor="ctr">
+            <a:spAutoFit/>
+          </a:bodyPr>
+          <a:lstStyle/>
+          <a:p>
+            <a:pPr rtl="1" algn="r">
+              <a:lnSpc>
+                <a:spcPct val="108000"/>
+              </a:lnSpc>
+              <a:spcBef>
+                <a:spcPts val="0"/>
+              </a:spcBef>
+              <a:spcAft>
+                <a:spcPts val="0"/>
+              </a:spcAft>
+            </a:pPr>
+            <a:r>
+              <a:rPr sz="1250" b="1">
+                <a:solidFill>
+                  <a:srgbClr val="1F2D38"/>
+                </a:solidFill>
+                <a:latin typeface="IRANSans"/>
+                <a:cs typeface="IRANSans"/>
+                <a:ea typeface="IRANSans"/>
+              </a:rPr>
+              <a:t>تیم‌های خودگردان</a:t>
+            </a:r>
+          </a:p>
+          <a:p>
+            <a:pPr rtl="1" algn="r">
+              <a:lnSpc>
+                <a:spcPct val="112000"/>
+              </a:lnSpc>
+              <a:spcBef>
+                <a:spcPts val="0"/>
+              </a:spcBef>
+              <a:spcAft>
+                <a:spcPts val="0"/>
+              </a:spcAft>
+            </a:pPr>
+            <a:r>
+              <a:rPr sz="1050" b="0">
+                <a:solidFill>
+                  <a:srgbClr val="5A6B77"/>
+                </a:solidFill>
+                <a:latin typeface="IRANSans"/>
+                <a:cs typeface="IRANSans"/>
+                <a:ea typeface="IRANSans"/>
+              </a:rPr>
+              <a:t>اختیار توزیع‌شده</a:t>
+            </a:r>
+          </a:p>
+        </p:txBody>
+      </p:sp>
+      <p:sp>
+        <p:nvSpPr>
+          <p:cNvPr id="47" name="TextBox 46"/>
+          <p:cNvSpPr txBox="1"/>
+          <p:nvPr/>
+        </p:nvSpPr>
+        <p:spPr>
+          <a:xfrm>
+            <a:off x="2828239" y="4009644"/>
+            <a:ext cx="1810512" cy="516636"/>
+          </a:xfrm>
+          <a:prstGeom prst="rect">
+            <a:avLst/>
+          </a:prstGeom>
+          <a:noFill/>
+        </p:spPr>
+        <p:txBody>
+          <a:bodyPr wrap="square" lIns="36576" rIns="36576" tIns="0" bIns="0" anchor="ctr">
+            <a:spAutoFit/>
+          </a:bodyPr>
+          <a:lstStyle/>
+          <a:p>
+            <a:pPr rtl="1" algn="r">
+              <a:lnSpc>
+                <a:spcPct val="108000"/>
+              </a:lnSpc>
+              <a:spcBef>
+                <a:spcPts val="0"/>
+              </a:spcBef>
+              <a:spcAft>
+                <a:spcPts val="0"/>
+              </a:spcAft>
+            </a:pPr>
+            <a:r>
+              <a:rPr sz="1250" b="1">
+                <a:solidFill>
+                  <a:srgbClr val="1F2D38"/>
+                </a:solidFill>
+                <a:latin typeface="IRANSans"/>
+                <a:cs typeface="IRANSans"/>
+                <a:ea typeface="IRANSans"/>
+              </a:rPr>
+              <a:t>سازمان شبکه‌ای</a:t>
+            </a:r>
+          </a:p>
+          <a:p>
+            <a:pPr rtl="1" algn="r">
+              <a:lnSpc>
+                <a:spcPct val="112000"/>
+              </a:lnSpc>
+              <a:spcBef>
+                <a:spcPts val="0"/>
+              </a:spcBef>
+              <a:spcAft>
+                <a:spcPts val="0"/>
+              </a:spcAft>
+            </a:pPr>
+            <a:r>
+              <a:rPr sz="1050" b="0">
+                <a:solidFill>
+                  <a:srgbClr val="5A6B77"/>
+                </a:solidFill>
+                <a:latin typeface="IRANSans"/>
+                <a:cs typeface="IRANSans"/>
+                <a:ea typeface="IRANSans"/>
+              </a:rPr>
+              <a:t>همکاری برخط و فرامرزی</a:t>
+            </a:r>
+          </a:p>
+        </p:txBody>
+      </p:sp>
+      <p:sp>
+        <p:nvSpPr>
+          <p:cNvPr id="48" name="Rounded Rectangle 47"/>
+          <p:cNvSpPr/>
+          <p:nvPr/>
+        </p:nvSpPr>
+        <p:spPr>
+          <a:xfrm>
+            <a:off x="2755087" y="4572000"/>
+            <a:ext cx="1956816" cy="516636"/>
+          </a:xfrm>
+          <a:prstGeom prst="roundRect">
+            <a:avLst>
+              <a:gd name="adj" fmla="val 14000"/>
+            </a:avLst>
+          </a:prstGeom>
+          <a:solidFill>
+            <a:srgbClr val="ECF3F7"/>
+          </a:solidFill>
+          <a:ln>
+            <a:noFill/>
+          </a:ln>
+          <a:effectLst/>
+        </p:spPr>
+        <p:style>
+          <a:lnRef idx="1">
+            <a:schemeClr val="accent1"/>
+          </a:lnRef>
+          <a:fillRef idx="3">
+            <a:schemeClr val="accent1"/>
+          </a:fillRef>
+          <a:effectRef idx="2">
+            <a:schemeClr val="accent1"/>
+          </a:effectRef>
+          <a:fontRef idx="minor">
+            <a:schemeClr val="lt1"/>
+          </a:fontRef>
+        </p:style>
+        <p:txBody>
+          <a:bodyPr rtlCol="0" anchor="ctr" wrap="square"/>
+          <a:lstStyle/>
+          <a:p>
+            <a:pPr algn="ctr"/>
+          </a:p>
+        </p:txBody>
+      </p:sp>
+      <p:sp>
+        <p:nvSpPr>
+          <p:cNvPr id="49" name="TextBox 48"/>
+          <p:cNvSpPr txBox="1"/>
+          <p:nvPr/>
+        </p:nvSpPr>
+        <p:spPr>
+          <a:xfrm>
+            <a:off x="2828239" y="4572000"/>
+            <a:ext cx="1810512" cy="516636"/>
+          </a:xfrm>
+          <a:prstGeom prst="rect">
+            <a:avLst/>
+          </a:prstGeom>
+          <a:noFill/>
+        </p:spPr>
+        <p:txBody>
+          <a:bodyPr wrap="square" lIns="36576" rIns="36576" tIns="0" bIns="0" anchor="ctr">
+            <a:spAutoFit/>
+          </a:bodyPr>
+          <a:lstStyle/>
+          <a:p>
+            <a:pPr rtl="1" algn="r">
+              <a:lnSpc>
+                <a:spcPct val="108000"/>
+              </a:lnSpc>
+              <a:spcBef>
+                <a:spcPts val="0"/>
+              </a:spcBef>
+              <a:spcAft>
+                <a:spcPts val="0"/>
+              </a:spcAft>
+            </a:pPr>
+            <a:r>
+              <a:rPr sz="1250" b="1">
+                <a:solidFill>
+                  <a:srgbClr val="1F2D38"/>
+                </a:solidFill>
+                <a:latin typeface="IRANSans"/>
+                <a:cs typeface="IRANSans"/>
+                <a:ea typeface="IRANSans"/>
+              </a:rPr>
+              <a:t>مدیریت الگوریتمی</a:t>
+            </a:r>
+          </a:p>
+          <a:p>
+            <a:pPr rtl="1" algn="r">
+              <a:lnSpc>
+                <a:spcPct val="112000"/>
+              </a:lnSpc>
+              <a:spcBef>
+                <a:spcPts val="0"/>
+              </a:spcBef>
+              <a:spcAft>
+                <a:spcPts val="0"/>
+              </a:spcAft>
+            </a:pPr>
+            <a:r>
+              <a:rPr sz="1050" b="0">
+                <a:solidFill>
+                  <a:srgbClr val="5A6B77"/>
+                </a:solidFill>
+                <a:latin typeface="IRANSans"/>
+                <a:cs typeface="IRANSans"/>
+                <a:ea typeface="IRANSans"/>
+              </a:rPr>
+              <a:t>داده، جای قضاوت را نمی‌گیرد</a:t>
+            </a:r>
+          </a:p>
+        </p:txBody>
+      </p:sp>
+      <p:sp>
+        <p:nvSpPr>
+          <p:cNvPr id="50" name="Rounded Rectangle 49"/>
+          <p:cNvSpPr/>
+          <p:nvPr/>
+        </p:nvSpPr>
+        <p:spPr>
+          <a:xfrm>
+            <a:off x="533095" y="1517904"/>
+            <a:ext cx="2002536" cy="4133087"/>
+          </a:xfrm>
+          <a:prstGeom prst="roundRect">
+            <a:avLst>
+              <a:gd name="adj" fmla="val 4500"/>
+            </a:avLst>
+          </a:prstGeom>
+          <a:solidFill>
+            <a:srgbClr val="FFFFFF"/>
+          </a:solidFill>
+          <a:ln w="12700">
+            <a:solidFill>
+              <a:srgbClr val="D8E2E9"/>
+            </a:solidFill>
+          </a:ln>
+          <a:effectLst/>
+        </p:spPr>
+        <p:style>
+          <a:lnRef idx="1">
+            <a:schemeClr val="accent1"/>
+          </a:lnRef>
+          <a:fillRef idx="3">
+            <a:schemeClr val="accent1"/>
+          </a:fillRef>
+          <a:effectRef idx="2">
+            <a:schemeClr val="accent1"/>
+          </a:effectRef>
+          <a:fontRef idx="minor">
+            <a:schemeClr val="lt1"/>
+          </a:fontRef>
+        </p:style>
+        <p:txBody>
+          <a:bodyPr rtlCol="0" anchor="ctr" wrap="square"/>
+          <a:lstStyle/>
+          <a:p>
+            <a:pPr algn="ctr"/>
+          </a:p>
+        </p:txBody>
+      </p:sp>
+      <p:sp>
+        <p:nvSpPr>
+          <p:cNvPr id="51" name="Rounded Rectangle 50"/>
+          <p:cNvSpPr/>
+          <p:nvPr/>
+        </p:nvSpPr>
+        <p:spPr>
+          <a:xfrm>
+            <a:off x="533095" y="1517904"/>
+            <a:ext cx="2002536" cy="713232"/>
+          </a:xfrm>
+          <a:prstGeom prst="roundRect">
+            <a:avLst>
+              <a:gd name="adj" fmla="val 10000"/>
             </a:avLst>
           </a:prstGeom>
           <a:solidFill>
@@ -53917,14 +54335,14 @@
       </p:sp>
       <p:sp>
         <p:nvSpPr>
-          <p:cNvPr id="50" name="Rectangle 49"/>
+          <p:cNvPr id="52" name="Rectangle 51"/>
           <p:cNvSpPr/>
           <p:nvPr/>
         </p:nvSpPr>
         <p:spPr>
           <a:xfrm>
-            <a:off x="11887" y="2286000"/>
-            <a:ext cx="3017520" cy="146304"/>
+            <a:off x="533095" y="2084832"/>
+            <a:ext cx="2002536" cy="146304"/>
           </a:xfrm>
           <a:prstGeom prst="rect">
             <a:avLst/>
@@ -53961,14 +54379,14 @@
       </p:sp>
       <p:sp>
         <p:nvSpPr>
-          <p:cNvPr id="51" name="TextBox 50"/>
+          <p:cNvPr id="53" name="TextBox 52"/>
           <p:cNvSpPr txBox="1"/>
           <p:nvPr/>
         </p:nvSpPr>
         <p:spPr>
           <a:xfrm>
-            <a:off x="11887" y="1975104"/>
-            <a:ext cx="3017520" cy="457200"/>
+            <a:off x="587959" y="1517904"/>
+            <a:ext cx="1892808" cy="713232"/>
           </a:xfrm>
           <a:prstGeom prst="rect">
             <a:avLst/>
@@ -53983,17 +54401,17 @@
           <a:p>
             <a:pPr rtl="1" algn="ctr">
               <a:lnSpc>
-                <a:spcPct val="100000"/>
-              </a:lnSpc>
-              <a:spcBef>
-                <a:spcPts val="0"/>
-              </a:spcBef>
-              <a:spcAft>
-                <a:spcPts val="0"/>
-              </a:spcAft>
-            </a:pPr>
-            <a:r>
-              <a:rPr sz="1450" b="1">
+                <a:spcPct val="105000"/>
+              </a:lnSpc>
+              <a:spcBef>
+                <a:spcPts val="0"/>
+              </a:spcBef>
+              <a:spcAft>
+                <a:spcPts val="0"/>
+              </a:spcAft>
+            </a:pPr>
+            <a:r>
+              <a:rPr sz="1350" b="1">
                 <a:solidFill>
                   <a:srgbClr val="FFFFFF"/>
                 </a:solidFill>
@@ -54001,21 +54419,45 @@
                 <a:cs typeface="IRANSans"/>
                 <a:ea typeface="IRANSans"/>
               </a:rPr>
-              <a:t>۲۰۱۱ تا امروز</a:t>
-            </a:r>
-          </a:p>
-        </p:txBody>
-      </p:sp>
-      <p:sp>
-        <p:nvSpPr>
-          <p:cNvPr id="52" name="Rounded Rectangle 51"/>
+              <a:t>موج ۵ · انسان‌محور</a:t>
+            </a:r>
+          </a:p>
+          <a:p>
+            <a:pPr rtl="1" algn="ctr">
+              <a:lnSpc>
+                <a:spcPct val="110000"/>
+              </a:lnSpc>
+              <a:spcBef>
+                <a:spcPts val="0"/>
+              </a:spcBef>
+              <a:spcAft>
+                <a:spcPts val="0"/>
+              </a:spcAft>
+            </a:pPr>
+            <a:r>
+              <a:rPr sz="1100" b="0">
+                <a:solidFill>
+                  <a:srgbClr val="FFFFFF"/>
+                </a:solidFill>
+                <a:latin typeface="IRANSans"/>
+                <a:cs typeface="IRANSans"/>
+                <a:ea typeface="IRANSans"/>
+              </a:rPr>
+              <a:t>۲۰۲۱ به بعد</a:t>
+            </a:r>
+          </a:p>
+        </p:txBody>
+      </p:sp>
+      <p:sp>
+        <p:nvSpPr>
+          <p:cNvPr id="54" name="Rounded Rectangle 53"/>
           <p:cNvSpPr/>
           <p:nvPr/>
         </p:nvSpPr>
         <p:spPr>
           <a:xfrm>
-            <a:off x="103327" y="2542032"/>
-            <a:ext cx="2834640" cy="480060"/>
+            <a:off x="606247" y="2322576"/>
+            <a:ext cx="1856232" cy="516636"/>
           </a:xfrm>
           <a:prstGeom prst="roundRect">
             <a:avLst>
@@ -54054,14 +54496,14 @@
       </p:sp>
       <p:sp>
         <p:nvSpPr>
-          <p:cNvPr id="53" name="TextBox 52"/>
+          <p:cNvPr id="55" name="TextBox 54"/>
           <p:cNvSpPr txBox="1"/>
           <p:nvPr/>
         </p:nvSpPr>
         <p:spPr>
           <a:xfrm>
-            <a:off x="213055" y="2542032"/>
-            <a:ext cx="2615184" cy="480060"/>
+            <a:off x="679399" y="2322576"/>
+            <a:ext cx="1709928" cy="516636"/>
           </a:xfrm>
           <a:prstGeom prst="rect">
             <a:avLst/>
@@ -54076,17 +54518,17 @@
           <a:p>
             <a:pPr rtl="1" algn="r">
               <a:lnSpc>
-                <a:spcPct val="105000"/>
-              </a:lnSpc>
-              <a:spcBef>
-                <a:spcPts val="0"/>
-              </a:spcBef>
-              <a:spcAft>
-                <a:spcPts val="0"/>
-              </a:spcAft>
-            </a:pPr>
-            <a:r>
-              <a:rPr sz="1450" b="1">
+                <a:spcPct val="108000"/>
+              </a:lnSpc>
+              <a:spcBef>
+                <a:spcPts val="0"/>
+              </a:spcBef>
+              <a:spcAft>
+                <a:spcPts val="0"/>
+              </a:spcAft>
+            </a:pPr>
+            <a:r>
+              <a:rPr sz="1250" b="1">
                 <a:solidFill>
                   <a:srgbClr val="1F2D38"/>
                 </a:solidFill>
@@ -54094,7 +54536,7 @@
                 <a:cs typeface="IRANSans"/>
                 <a:ea typeface="IRANSans"/>
               </a:rPr>
-              <a:t>سازمان داده‌محور ۲۰۱۱</a:t>
+              <a:t>صنعت ۵٫۰ — اروپا ۲۰۲۱</a:t>
             </a:r>
           </a:p>
           <a:p>
@@ -54110,7 +54552,7 @@
               </a:spcAft>
             </a:pPr>
             <a:r>
-              <a:rPr sz="1200" b="0">
+              <a:rPr sz="1050" b="0">
                 <a:solidFill>
                   <a:srgbClr val="5A6B77"/>
                 </a:solidFill>
@@ -54118,21 +54560,21 @@
                 <a:cs typeface="IRANSans"/>
                 <a:ea typeface="IRANSans"/>
               </a:rPr>
-              <a:t>تصمیم بر پایه داده، نه حدس</a:t>
-            </a:r>
-          </a:p>
-        </p:txBody>
-      </p:sp>
-      <p:sp>
-        <p:nvSpPr>
-          <p:cNvPr id="54" name="TextBox 53"/>
+              <a:t>انسان‌محور، تاب‌آور، پایدار</a:t>
+            </a:r>
+          </a:p>
+        </p:txBody>
+      </p:sp>
+      <p:sp>
+        <p:nvSpPr>
+          <p:cNvPr id="56" name="TextBox 55"/>
           <p:cNvSpPr txBox="1"/>
           <p:nvPr/>
         </p:nvSpPr>
         <p:spPr>
           <a:xfrm>
-            <a:off x="213055" y="3067812"/>
-            <a:ext cx="2615184" cy="480060"/>
+            <a:off x="679399" y="2884932"/>
+            <a:ext cx="1709928" cy="516636"/>
           </a:xfrm>
           <a:prstGeom prst="rect">
             <a:avLst/>
@@ -54147,17 +54589,17 @@
           <a:p>
             <a:pPr rtl="1" algn="r">
               <a:lnSpc>
-                <a:spcPct val="105000"/>
-              </a:lnSpc>
-              <a:spcBef>
-                <a:spcPts val="0"/>
-              </a:spcBef>
-              <a:spcAft>
-                <a:spcPts val="0"/>
-              </a:spcAft>
-            </a:pPr>
-            <a:r>
-              <a:rPr sz="1450" b="1">
+                <a:spcPct val="108000"/>
+              </a:lnSpc>
+              <a:spcBef>
+                <a:spcPts val="0"/>
+              </a:spcBef>
+              <a:spcAft>
+                <a:spcPts val="0"/>
+              </a:spcAft>
+            </a:pPr>
+            <a:r>
+              <a:rPr sz="1250" b="1">
                 <a:solidFill>
                   <a:srgbClr val="1F2D38"/>
                 </a:solidFill>
@@ -54165,7 +54607,7 @@
                 <a:cs typeface="IRANSans"/>
                 <a:ea typeface="IRANSans"/>
               </a:rPr>
-              <a:t>هولاکراسی و تیم خودگردان</a:t>
+              <a:t>رهبری تاب‌آور</a:t>
             </a:r>
           </a:p>
           <a:p>
@@ -54181,7 +54623,7 @@
               </a:spcAft>
             </a:pPr>
             <a:r>
-              <a:rPr sz="1200" b="0">
+              <a:rPr sz="1050" b="0">
                 <a:solidFill>
                   <a:srgbClr val="5A6B77"/>
                 </a:solidFill>
@@ -54189,21 +54631,21 @@
                 <a:cs typeface="IRANSans"/>
                 <a:ea typeface="IRANSans"/>
               </a:rPr>
-              <a:t>اختیار توزیع‌شده</a:t>
-            </a:r>
-          </a:p>
-        </p:txBody>
-      </p:sp>
-      <p:sp>
-        <p:nvSpPr>
-          <p:cNvPr id="55" name="Rounded Rectangle 54"/>
+              <a:t>مدیریت در بحران و عدم‌قطعیت</a:t>
+            </a:r>
+          </a:p>
+        </p:txBody>
+      </p:sp>
+      <p:sp>
+        <p:nvSpPr>
+          <p:cNvPr id="57" name="Rounded Rectangle 56"/>
           <p:cNvSpPr/>
           <p:nvPr/>
         </p:nvSpPr>
         <p:spPr>
           <a:xfrm>
-            <a:off x="103327" y="3593592"/>
-            <a:ext cx="2834640" cy="480060"/>
+            <a:off x="606247" y="3447288"/>
+            <a:ext cx="1856232" cy="516636"/>
           </a:xfrm>
           <a:prstGeom prst="roundRect">
             <a:avLst>
@@ -54242,14 +54684,14 @@
       </p:sp>
       <p:sp>
         <p:nvSpPr>
-          <p:cNvPr id="56" name="TextBox 55"/>
+          <p:cNvPr id="58" name="TextBox 57"/>
           <p:cNvSpPr txBox="1"/>
           <p:nvPr/>
         </p:nvSpPr>
         <p:spPr>
           <a:xfrm>
-            <a:off x="213055" y="3593592"/>
-            <a:ext cx="2615184" cy="480060"/>
+            <a:off x="679399" y="3447288"/>
+            <a:ext cx="1709928" cy="516636"/>
           </a:xfrm>
           <a:prstGeom prst="rect">
             <a:avLst/>
@@ -54264,17 +54706,17 @@
           <a:p>
             <a:pPr rtl="1" algn="r">
               <a:lnSpc>
-                <a:spcPct val="105000"/>
-              </a:lnSpc>
-              <a:spcBef>
-                <a:spcPts val="0"/>
-              </a:spcBef>
-              <a:spcAft>
-                <a:spcPts val="0"/>
-              </a:spcAft>
-            </a:pPr>
-            <a:r>
-              <a:rPr sz="1450" b="1">
+                <a:spcPct val="108000"/>
+              </a:lnSpc>
+              <a:spcBef>
+                <a:spcPts val="0"/>
+              </a:spcBef>
+              <a:spcAft>
+                <a:spcPts val="0"/>
+              </a:spcAft>
+            </a:pPr>
+            <a:r>
+              <a:rPr sz="1250" b="1">
                 <a:solidFill>
                   <a:srgbClr val="1F2D38"/>
                 </a:solidFill>
@@ -54282,7 +54724,7 @@
                 <a:cs typeface="IRANSans"/>
                 <a:ea typeface="IRANSans"/>
               </a:rPr>
-              <a:t>رهبری تاب‌آور ۲۰۲۰</a:t>
+              <a:t>مدیریت انسان‌محور</a:t>
             </a:r>
           </a:p>
           <a:p>
@@ -54298,7 +54740,7 @@
               </a:spcAft>
             </a:pPr>
             <a:r>
-              <a:rPr sz="1200" b="0">
+              <a:rPr sz="1050" b="0">
                 <a:solidFill>
                   <a:srgbClr val="5A6B77"/>
                 </a:solidFill>
@@ -54306,21 +54748,21 @@
                 <a:cs typeface="IRANSans"/>
                 <a:ea typeface="IRANSans"/>
               </a:rPr>
-              <a:t>مدیریت در بحران و عدم‌قطعیت</a:t>
-            </a:r>
-          </a:p>
-        </p:txBody>
-      </p:sp>
-      <p:sp>
-        <p:nvSpPr>
-          <p:cNvPr id="57" name="TextBox 56"/>
+              <a:t>رفاه کارکنان کنار بهره‌وری</a:t>
+            </a:r>
+          </a:p>
+        </p:txBody>
+      </p:sp>
+      <p:sp>
+        <p:nvSpPr>
+          <p:cNvPr id="59" name="TextBox 58"/>
           <p:cNvSpPr txBox="1"/>
           <p:nvPr/>
         </p:nvSpPr>
         <p:spPr>
           <a:xfrm>
-            <a:off x="213055" y="4119372"/>
-            <a:ext cx="2615184" cy="480060"/>
+            <a:off x="679399" y="4009644"/>
+            <a:ext cx="1709928" cy="516636"/>
           </a:xfrm>
           <a:prstGeom prst="rect">
             <a:avLst/>
@@ -54335,17 +54777,17 @@
           <a:p>
             <a:pPr rtl="1" algn="r">
               <a:lnSpc>
-                <a:spcPct val="105000"/>
-              </a:lnSpc>
-              <a:spcBef>
-                <a:spcPts val="0"/>
-              </a:spcBef>
-              <a:spcAft>
-                <a:spcPts val="0"/>
-              </a:spcAft>
-            </a:pPr>
-            <a:r>
-              <a:rPr sz="1450" b="1">
+                <a:spcPct val="108000"/>
+              </a:lnSpc>
+              <a:spcBef>
+                <a:spcPts val="0"/>
+              </a:spcBef>
+              <a:spcAft>
+                <a:spcPts val="0"/>
+              </a:spcAft>
+            </a:pPr>
+            <a:r>
+              <a:rPr sz="1250" b="1">
                 <a:solidFill>
                   <a:srgbClr val="1F2D38"/>
                 </a:solidFill>
@@ -54353,7 +54795,7 @@
                 <a:cs typeface="IRANSans"/>
                 <a:ea typeface="IRANSans"/>
               </a:rPr>
-              <a:t>مدیریت انسان‌محور ۲۰۲۱</a:t>
+              <a:t>پایداری و مسئولیت</a:t>
             </a:r>
           </a:p>
           <a:p>
@@ -54369,7 +54811,7 @@
               </a:spcAft>
             </a:pPr>
             <a:r>
-              <a:rPr sz="1200" b="0">
+              <a:rPr sz="1050" b="0">
                 <a:solidFill>
                   <a:srgbClr val="5A6B77"/>
                 </a:solidFill>
@@ -54377,21 +54819,21 @@
                 <a:cs typeface="IRANSans"/>
                 <a:ea typeface="IRANSans"/>
               </a:rPr>
-              <a:t>رفاه کارکنان، هم‌تراز با بهره‌وری</a:t>
-            </a:r>
-          </a:p>
-        </p:txBody>
-      </p:sp>
-      <p:sp>
-        <p:nvSpPr>
-          <p:cNvPr id="58" name="Rounded Rectangle 57"/>
+              <a:t>سود، کنار محیط زیست</a:t>
+            </a:r>
+          </a:p>
+        </p:txBody>
+      </p:sp>
+      <p:sp>
+        <p:nvSpPr>
+          <p:cNvPr id="60" name="Rounded Rectangle 59"/>
           <p:cNvSpPr/>
           <p:nvPr/>
         </p:nvSpPr>
         <p:spPr>
           <a:xfrm>
-            <a:off x="103327" y="4645152"/>
-            <a:ext cx="2834640" cy="480060"/>
+            <a:off x="606247" y="4572000"/>
+            <a:ext cx="1856232" cy="516636"/>
           </a:xfrm>
           <a:prstGeom prst="roundRect">
             <a:avLst>
@@ -54430,14 +54872,14 @@
       </p:sp>
       <p:sp>
         <p:nvSpPr>
-          <p:cNvPr id="59" name="TextBox 58"/>
+          <p:cNvPr id="61" name="TextBox 60"/>
           <p:cNvSpPr txBox="1"/>
           <p:nvPr/>
         </p:nvSpPr>
         <p:spPr>
           <a:xfrm>
-            <a:off x="213055" y="4645152"/>
-            <a:ext cx="2615184" cy="480060"/>
+            <a:off x="679399" y="4572000"/>
+            <a:ext cx="1709928" cy="516636"/>
           </a:xfrm>
           <a:prstGeom prst="rect">
             <a:avLst/>
@@ -54452,17 +54894,17 @@
           <a:p>
             <a:pPr rtl="1" algn="r">
               <a:lnSpc>
-                <a:spcPct val="105000"/>
-              </a:lnSpc>
-              <a:spcBef>
-                <a:spcPts val="0"/>
-              </a:spcBef>
-              <a:spcAft>
-                <a:spcPts val="0"/>
-              </a:spcAft>
-            </a:pPr>
-            <a:r>
-              <a:rPr sz="1450" b="1">
+                <a:spcPct val="108000"/>
+              </a:lnSpc>
+              <a:spcBef>
+                <a:spcPts val="0"/>
+              </a:spcBef>
+              <a:spcAft>
+                <a:spcPts val="0"/>
+              </a:spcAft>
+            </a:pPr>
+            <a:r>
+              <a:rPr sz="1250" b="1">
                 <a:solidFill>
                   <a:srgbClr val="1F2D38"/>
                 </a:solidFill>
@@ -54470,7 +54912,7 @@
                 <a:cs typeface="IRANSans"/>
                 <a:ea typeface="IRANSans"/>
               </a:rPr>
-              <a:t>پایداری و مسئولیت</a:t>
+              <a:t>رهبری خدمتگزار</a:t>
             </a:r>
           </a:p>
           <a:p>
@@ -54486,7 +54928,7 @@
               </a:spcAft>
             </a:pPr>
             <a:r>
-              <a:rPr sz="1200" b="0">
+              <a:rPr sz="1050" b="0">
                 <a:solidFill>
                   <a:srgbClr val="5A6B77"/>
                 </a:solidFill>
@@ -54494,21 +54936,21 @@
                 <a:cs typeface="IRANSans"/>
                 <a:ea typeface="IRANSans"/>
               </a:rPr>
-              <a:t>سود، در کنار محیط زیست و جامعه</a:t>
-            </a:r>
-          </a:p>
-        </p:txBody>
-      </p:sp>
-      <p:sp>
-        <p:nvSpPr>
-          <p:cNvPr id="60" name="TextBox 59"/>
+              <a:t>مدیر، راه رشد را باز می‌کند</a:t>
+            </a:r>
+          </a:p>
+        </p:txBody>
+      </p:sp>
+      <p:sp>
+        <p:nvSpPr>
+          <p:cNvPr id="62" name="TextBox 61"/>
           <p:cNvSpPr txBox="1"/>
           <p:nvPr/>
         </p:nvSpPr>
         <p:spPr>
           <a:xfrm>
-            <a:off x="566928" y="6382512"/>
-            <a:ext cx="3657600" cy="274320"/>
+            <a:off x="566928" y="5760720"/>
+            <a:ext cx="11057839" cy="420624"/>
           </a:xfrm>
           <a:prstGeom prst="rect">
             <a:avLst/>
@@ -54521,6 +54963,64 @@
           </a:bodyPr>
           <a:lstStyle/>
           <a:p>
+            <a:pPr rtl="1" algn="ctr">
+              <a:lnSpc>
+                <a:spcPct val="120000"/>
+              </a:lnSpc>
+              <a:spcBef>
+                <a:spcPts val="0"/>
+              </a:spcBef>
+              <a:spcAft>
+                <a:spcPts val="0"/>
+              </a:spcAft>
+            </a:pPr>
+            <a:r>
+              <a:rPr sz="1450" b="1">
+                <a:solidFill>
+                  <a:srgbClr val="FF6B35"/>
+                </a:solidFill>
+                <a:latin typeface="IRANSans"/>
+                <a:cs typeface="IRANSans"/>
+                <a:ea typeface="IRANSans"/>
+              </a:rPr>
+              <a:t>پیام نقشه:  </a:t>
+            </a:r>
+            <a:r>
+              <a:rPr sz="1450" b="0">
+                <a:solidFill>
+                  <a:srgbClr val="1F2D38"/>
+                </a:solidFill>
+                <a:latin typeface="IRANSans"/>
+                <a:cs typeface="IRANSans"/>
+                <a:ea typeface="IRANSans"/>
+              </a:rPr>
+              <a:t>هر ستون، پاسخ مدیریتیِ زمانِ خودش بود؛ مسئله وقتی شروع می‌شود که محیط به ستون چهارم رفته و ما هنوز با ستون دوم مدیریت می‌کنیم.</a:t>
+            </a:r>
+          </a:p>
+        </p:txBody>
+      </p:sp>
+      <p:sp>
+        <p:nvSpPr>
+          <p:cNvPr id="63" name="TextBox 62"/>
+          <p:cNvSpPr txBox="1"/>
+          <p:nvPr/>
+        </p:nvSpPr>
+        <p:spPr>
+          <a:xfrm>
+            <a:off x="566928" y="6382512"/>
+            <a:ext cx="3657600" cy="274320"/>
+          </a:xfrm>
+          <a:prstGeom prst="rect">
+            <a:avLst/>
+          </a:prstGeom>
+          <a:noFill/>
+        </p:spPr>
+        <p:txBody>
+          <a:bodyPr wrap="square" lIns="36576" rIns="36576" tIns="0" bIns="0" anchor="t">
+            <a:spAutoFit/>
+          </a:bodyPr>
+          <a:lstStyle/>
+          <a:p>
             <a:pPr rtl="1" algn="r">
               <a:lnSpc>
                 <a:spcPct val="100000"/>
@@ -54548,7 +55048,7 @@
       </p:sp>
       <p:sp>
         <p:nvSpPr>
-          <p:cNvPr id="61" name="TextBox 60"/>
+          <p:cNvPr id="64" name="TextBox 63"/>
           <p:cNvSpPr txBox="1"/>
           <p:nvPr/>
         </p:nvSpPr>
@@ -56749,7 +57249,7 @@
                 <a:cs typeface="IRANSans"/>
                 <a:ea typeface="IRANSans"/>
               </a:rPr>
-              <a:t>سازمان داده‌محور، تیم‌های خودگردان</a:t>
+              <a:t>صنعت ۴٫۰، سازمان داده‌محور، تیم‌های خودگردان</a:t>
             </a:r>
           </a:p>
         </p:txBody>
@@ -57191,7 +57691,7 @@
                 <a:cs typeface="IRANSans"/>
                 <a:ea typeface="IRANSans"/>
               </a:rPr>
-              <a:t>مدیریت انسان‌محور، رهبری تاب‌آور و پایدار</a:t>
+              <a:t>صنعت ۵٫۰، مدیریت انسان‌محور و تاب‌آور</a:t>
             </a:r>
           </a:p>
         </p:txBody>
@@ -57285,7 +57785,7 @@
                 <a:cs typeface="IRANSans"/>
                 <a:ea typeface="IRANSans"/>
               </a:rPr>
-              <a:t>مربی‌گری، رشد معنا‌محور</a:t>
+              <a:t>مربی‌گری، رشد معنامحور</a:t>
             </a:r>
           </a:p>
         </p:txBody>
@@ -57528,7 +58028,7 @@
                 <a:cs typeface="IRANSans"/>
                 <a:ea typeface="IRANSans"/>
               </a:rPr>
-              <a:t>ما با سبک مدیریت موج دوم، می‌خواهیم در محیط موج چهارم رقابت کنیم. ستون «شیوه توسعه افراد» کوتاه‌ترین راه عبور است.</a:t>
+              <a:t>ما با سبک مدیریت موج دوم، می‌خواهیم در محیط موج چهارم و پنجم رقابت کنیم. ستون «شیوه توسعه افراد» کوتاه‌ترین راه عبور است.</a:t>
             </a:r>
           </a:p>
         </p:txBody>
